--- a/downloads/DCT_V2_Ch13_Slides.pptx
+++ b/downloads/DCT_V2_Ch13_Slides.pptx
@@ -27,9 +27,10 @@
     <p:sldId id="275" r:id="rId21"/>
     <p:sldId id="276" r:id="rId22"/>
     <p:sldId id="277" r:id="rId23"/>
+    <p:sldId id="278" r:id="rId24"/>
   </p:sldIdLst>
   <p:notesMasterIdLst>
-    <p:notesMasterId r:id="rId24"/>
+    <p:notesMasterId r:id="rId25"/>
   </p:notesMasterIdLst>
   <p:sldSz cx="12192000" cy="6858000"/>
   <p:notesSz cx="6858000" cy="12192000"/>
@@ -128,7 +129,7 @@
   <p:extLst>
     <p:ext uri="{521415D9-36F7-43E2-AB2F-B90AF26B5E84}">
       <p14:sectionLst xmlns:p14="http://schemas.microsoft.com/office/powerpoint/2010/main">
-        <p14:section name="Opening" id="{8a2b30fe-03db-eb70-148e-7446322c0454}">
+        <p14:section name="Opening" id="{1f1c2005-17e1-6644-9f84-537a6d3b4e14}">
           <p14:sldIdLst>
             <p14:sldId id="256"/>
             <p14:sldId id="257"/>
@@ -136,36 +137,36 @@
             <p14:sldId id="259"/>
           </p14:sldIdLst>
         </p14:section>
-        <p14:section name="13.1 Learning Inside a Declared Model" id="{a46f296f-dcfd-7cd3-3254-9ecb68ad84a8}">
+        <p14:section name="13.1 Learning Inside a Declared Model" id="{b3b0355d-00ef-d3da-7e59-74d0f0fee5d0}">
           <p14:sldIdLst>
             <p14:sldId id="260"/>
           </p14:sldIdLst>
         </p14:section>
-        <p14:section name="13.2 Learning from a Record" id="{160df57c-adc1-b896-bd7a-79e3b8bd8b87}">
+        <p14:section name="13.2 Learning from a Record" id="{a5bdcc51-36da-1d24-199e-cf35472b5695}">
           <p14:sldIdLst>
             <p14:sldId id="261"/>
             <p14:sldId id="262"/>
           </p14:sldIdLst>
         </p14:section>
-        <p14:section name="13.3 From Predictions to Decisions" id="{9a3fb9a6-6fe0-34b2-199a-2faf9f4afc94}">
+        <p14:section name="13.3 From Predictions to Decisions" id="{1185d73a-e034-e6e6-05d9-553c11a0d301}">
           <p14:sldIdLst>
             <p14:sldId id="263"/>
             <p14:sldId id="264"/>
           </p14:sldIdLst>
         </p14:section>
-        <p14:section name="13.4 Honest Checks" id="{bd361ca0-7062-0a13-ef81-75e7bead5596}">
+        <p14:section name="13.4 Honest Checks" id="{09389ee8-02b8-df7b-85a1-8934b8dddab7}">
           <p14:sldIdLst>
             <p14:sldId id="265"/>
             <p14:sldId id="266"/>
             <p14:sldId id="267"/>
           </p14:sldIdLst>
         </p14:section>
-        <p14:section name="13.5 Reading a Model" id="{cce6e950-cd61-1011-a25b-d2928246dc12}">
+        <p14:section name="13.5 Reading a Model" id="{3dcb62e6-9e25-4452-afd3-8f04131bee53}">
           <p14:sldIdLst>
             <p14:sldId id="268"/>
           </p14:sldIdLst>
         </p14:section>
-        <p14:section name="Worked Example 13.1" id="{1dbd5bf1-9aca-2a7a-68c0-657f35c78a33}">
+        <p14:section name="Worked Example 13.1" id="{624d5cc3-8776-a9de-0241-a93123be6462}">
           <p14:sldIdLst>
             <p14:sldId id="269"/>
             <p14:sldId id="270"/>
@@ -174,16 +175,21 @@
             <p14:sldId id="273"/>
           </p14:sldIdLst>
         </p14:section>
-        <p14:section name="AXIOM Lab 2.13" id="{ef89c2cd-c2d7-d21b-5b1f-32ae32a72912}">
+        <p14:section name="In Practice" id="{9b52c9d2-8b69-9531-84b6-a8b5f21a3b57}">
           <p14:sldIdLst>
             <p14:sldId id="274"/>
           </p14:sldIdLst>
         </p14:section>
-        <p14:section name="Close" id="{8e0ae19b-5ed4-9374-356d-f669c14cc2be}">
+        <p14:section name="AXIOM Lab 2.13" id="{f6ae24d7-65a3-1a06-1187-d39ceeec30c5}">
           <p14:sldIdLst>
             <p14:sldId id="275"/>
+          </p14:sldIdLst>
+        </p14:section>
+        <p14:section name="Close" id="{20a2302c-79a8-35bb-b958-4e3eeb479047}">
+          <p14:sldIdLst>
             <p14:sldId id="276"/>
             <p14:sldId id="277"/>
+            <p14:sldId id="278"/>
           </p14:sldIdLst>
         </p14:section>
       </p14:sectionLst>
@@ -1470,7 +1476,7 @@
           <a:p>
             <a:r>
               <a:rPr lang="en-US" dirty="0"/>
-              <a:t>AXIOM Lab 2.13. What to look for: a ceiling well below a perfect warning (Theorem 13.2(iii)); a valuable threshold that is less accurate than never warning (Theorem 13.2(ii)); a perfect record score that breaks the appetite (Theorem 13.1); certified designs that keep it (Theorem 13.3); and an index that keeps the variance and loses the warning (Proposition 13.3(ii)).</a:t>
+              <a:t>In Practice, Chapter 13: Netflix Pays a Million Dollars for Ten Percent. A real organization's decision of this chapter's kind, told from its published record; every figure is cited in the book. The lesson for Meridian: Judge a model on data it has not seen, and value it by the decisions it changes. Sources: Bennett and Lanning (2007); Feuerverger, He and Khatri (2012); Koren, Bell and Volinsky (2009); Netflix Tech Blog (2012); Gomez-Uribe and Hunt (2015); FTC (2010).</a:t>
             </a:r>
             <a:endParaRPr lang="en-US" dirty="0"/>
           </a:p>
@@ -1646,7 +1652,7 @@
           <a:p>
             <a:r>
               <a:rPr lang="en-US" dirty="0"/>
-              <a:t>Key Takeaways, Chapter 13.</a:t>
+              <a:t>AXIOM Lab 2.13. What to look for: a ceiling well below a perfect warning (Theorem 13.2(iii)); a valuable threshold that is less accurate than never warning (Theorem 13.2(ii)); a perfect record score that breaks the appetite (Theorem 13.1); certified designs that keep it (Theorem 13.3); and an index that keeps the variance and loses the warning (Proposition 13.3(ii)).</a:t>
             </a:r>
             <a:endParaRPr lang="en-US" dirty="0"/>
           </a:p>
@@ -1734,7 +1740,7 @@
           <a:p>
             <a:r>
               <a:rPr lang="en-US" dirty="0"/>
-              <a:t>The notebook and workbook are on the course website, www.dynamiccorporatetransformation.com.</a:t>
+              <a:t>Key Takeaways, Chapter 13.</a:t>
             </a:r>
             <a:endParaRPr lang="en-US" dirty="0"/>
           </a:p>
@@ -1822,7 +1828,7 @@
           <a:p>
             <a:r>
               <a:rPr lang="en-US" dirty="0"/>
-              <a:t>The inequality is Theorem 13.2(iii), the information ceiling: a rule that reads a function g(X) of the features does no better than the best rule that reads X, and none does better than a clairvoyant who reads the outcome. Chapter 14, Artificial Intelligence for Enterprise Optimization, is the next chapter of Part IV, Multi-Objective and Intelligent Enterprise Optimization.</a:t>
+              <a:t>The notebook and workbook are on the course website, www.dynamiccorporatetransformation.com.</a:t>
             </a:r>
             <a:endParaRPr lang="en-US" dirty="0"/>
           </a:p>
@@ -1846,6 +1852,94 @@
             <a:fld id="{F7021451-1387-4CA6-816F-3879F97B5CBC}" type="slidenum">
               <a:rPr lang="en-US"/>
               <a:t>22</a:t>
+            </a:fld>
+            <a:endParaRPr lang="en-US"/>
+          </a:p>
+        </p:txBody>
+      </p:sp>
+    </p:spTree>
+    <p:extLst>
+      <p:ext uri="{BB962C8B-B14F-4D97-AF65-F5344CB8AC3E}">
+        <p14:creationId xmlns:p14="http://schemas.microsoft.com/office/powerpoint/2010/main" val="1024086991"/>
+      </p:ext>
+    </p:extLst>
+  </p:cSld>
+  <p:clrMapOvr>
+    <a:masterClrMapping/>
+  </p:clrMapOvr>
+</p:notes>
+</file>
+
+<file path=ppt/notesSlides/notesSlide23.xml><?xml version="1.0" encoding="utf-8"?>
+<p:notes xmlns:a="http://schemas.openxmlformats.org/drawingml/2006/main" xmlns:r="http://schemas.openxmlformats.org/officeDocument/2006/relationships" xmlns:p="http://schemas.openxmlformats.org/presentationml/2006/main">
+  <p:cSld>
+    <p:spTree>
+      <p:nvGrpSpPr>
+        <p:cNvPr id="1" name=""/>
+        <p:cNvGrpSpPr/>
+        <p:nvPr/>
+      </p:nvGrpSpPr>
+      <p:grpSpPr>
+        <a:xfrm>
+          <a:off x="0" y="0"/>
+          <a:ext cx="0" cy="0"/>
+          <a:chOff x="0" y="0"/>
+          <a:chExt cx="0" cy="0"/>
+        </a:xfrm>
+      </p:grpSpPr>
+      <p:sp>
+        <p:nvSpPr>
+          <p:cNvPr id="2" name="Slide Image Placeholder 1"/>
+          <p:cNvSpPr>
+            <a:spLocks noGrp="1" noRot="1" noChangeAspect="1"/>
+          </p:cNvSpPr>
+          <p:nvPr>
+            <p:ph type="sldImg"/>
+          </p:nvPr>
+        </p:nvSpPr>
+        <p:spPr/>
+      </p:sp>
+      <p:sp>
+        <p:nvSpPr>
+          <p:cNvPr id="3" name="Notes Placeholder 2"/>
+          <p:cNvSpPr>
+            <a:spLocks noGrp="1"/>
+          </p:cNvSpPr>
+          <p:nvPr>
+            <p:ph type="body" idx="1"/>
+          </p:nvPr>
+        </p:nvSpPr>
+        <p:spPr/>
+        <p:txBody>
+          <a:bodyPr/>
+          <a:lstStyle/>
+          <a:p>
+            <a:r>
+              <a:rPr lang="en-US" dirty="0"/>
+              <a:t>The inequality is Theorem 13.2(iii), the information ceiling: a rule that reads a function g(X) of the features does no better than the best rule that reads X, and none does better than a clairvoyant who reads the outcome. Chapter 14, Artificial Intelligence for Enterprise Optimization, is the next chapter of Part IV, Multi-Objective and Intelligent Enterprise Optimization.</a:t>
+            </a:r>
+            <a:endParaRPr lang="en-US" dirty="0"/>
+          </a:p>
+        </p:txBody>
+      </p:sp>
+      <p:sp>
+        <p:nvSpPr>
+          <p:cNvPr id="4" name="Slide Number Placeholder 3"/>
+          <p:cNvSpPr>
+            <a:spLocks noGrp="1"/>
+          </p:cNvSpPr>
+          <p:nvPr>
+            <p:ph type="sldNum" sz="quarter" idx="10"/>
+          </p:nvPr>
+        </p:nvSpPr>
+        <p:spPr/>
+        <p:txBody>
+          <a:bodyPr/>
+          <a:lstStyle/>
+          <a:p>
+            <a:fld id="{F7021451-1387-4CA6-816F-3879F97B5CBC}" type="slidenum">
+              <a:rPr lang="en-US"/>
+              <a:t>23</a:t>
             </a:fld>
             <a:endParaRPr lang="en-US"/>
           </a:p>
@@ -15086,7 +15180,7 @@
                   <a:schemeClr val="accent1"/>
                 </a:solidFill>
               </a:rPr>
-              <a:t>AXIOM LAB 2.13 · MODULE AXIOM-13</a:t>
+              <a:t>IN PRACTICE · NETFLIX PRIZE</a:t>
             </a:r>
             <a:endParaRPr lang="en-US" sz="1200" dirty="0"/>
           </a:p>
@@ -15127,804 +15221,26 @@
                 <a:ea typeface="Cambria" pitchFamily="34" charset="-122"/>
                 <a:cs typeface="Cambria" pitchFamily="34" charset="-120"/>
               </a:rPr>
-              <a:t>Pricing a learned warning, in AXIOM</a:t>
+              <a:t>Netflix paid $1m for ten percent</a:t>
             </a:r>
             <a:endParaRPr lang="en-US" sz="3200" dirty="0"/>
           </a:p>
         </p:txBody>
       </p:sp>
-      <p:pic>
-        <p:nvPicPr>
-          <p:cNvPr id="5" name="AXIOM logo" descr="AXIOM">    </p:cNvPr>
-          <p:cNvPicPr>
-            <a:picLocks noChangeAspect="1"/>
-          </p:cNvPicPr>
-          <p:nvPr/>
-        </p:nvPicPr>
-        <p:blipFill>
-          <a:blip r:embed="rId1"/>
-          <a:stretch>
-            <a:fillRect/>
-          </a:stretch>
-        </p:blipFill>
-        <p:spPr>
-          <a:xfrm>
-            <a:off x="9539935" y="310896"/>
-            <a:ext cx="2103120" cy="420624"/>
-          </a:xfrm>
-          <a:prstGeom prst="rect">
-            <a:avLst/>
-          </a:prstGeom>
-        </p:spPr>
-      </p:pic>
-      <p:sp>
-        <p:nvSpPr>
-          <p:cNvPr id="6" name="Situation"/>
-          <p:cNvSpPr txBox="1"/>
-          <p:nvPr/>
-        </p:nvSpPr>
-        <p:spPr>
-          <a:xfrm>
-            <a:off x="548640" y="1645920"/>
-            <a:ext cx="11094415" cy="777240"/>
-          </a:xfrm>
-          <a:prstGeom prst="rect">
-            <a:avLst/>
-          </a:prstGeom>
-          <a:noFill/>
-          <a:ln/>
-        </p:spPr>
-        <p:txBody>
-          <a:bodyPr wrap="square" lIns="0" tIns="0" rIns="0" bIns="0" rtlCol="0" anchor="t"/>
-          <a:lstStyle/>
-          <a:p>
-            <a:pPr indent="0" marL="0">
-              <a:buNone/>
-            </a:pPr>
-            <a:r>
-              <a:rPr lang="en-US" sz="1500" dirty="0">
-                <a:solidFill>
-                  <a:schemeClr val="tx1"/>
-                </a:solidFill>
-              </a:rPr>
-              <a:t>The audit committee will not pay for the desk's warning until it knows what the warning can be worth, at which threshold to read it, and whether its promise survives fresh data. Open AXIOM, choose Lab 2.13 and load the Meridian warning instance.</a:t>
-            </a:r>
-            <a:endParaRPr lang="en-US" sz="1500" dirty="0"/>
-          </a:p>
-        </p:txBody>
-      </p:sp>
-      <p:sp>
-        <p:nvSpPr>
-          <p:cNvPr id="7" name="Flow line"/>
+      <p:sp>
+        <p:nvSpPr>
+          <p:cNvPr id="5" name="Card"/>
           <p:cNvSpPr/>
           <p:nvPr/>
         </p:nvSpPr>
         <p:spPr>
           <a:xfrm>
-            <a:off x="1658082" y="2880360"/>
-            <a:ext cx="8875532" cy="0"/>
-          </a:xfrm>
-          <a:prstGeom prst="line">
-            <a:avLst/>
-          </a:prstGeom>
-          <a:noFill/>
-          <a:ln w="25400">
-            <a:solidFill>
-              <a:srgbClr val="C4CBD8"/>
-            </a:solidFill>
-            <a:prstDash val="solid"/>
-          </a:ln>
-        </p:spPr>
-      </p:sp>
-      <p:sp>
-        <p:nvSpPr>
-          <p:cNvPr id="8" name="Number"/>
-          <p:cNvSpPr/>
-          <p:nvPr/>
-        </p:nvSpPr>
-        <p:spPr>
-          <a:xfrm>
-            <a:off x="1383762" y="2606040"/>
-            <a:ext cx="548640" cy="548640"/>
-          </a:xfrm>
-          <a:prstGeom prst="ellipse">
-            <a:avLst/>
-          </a:prstGeom>
-          <a:solidFill>
-            <a:schemeClr val="accent1"/>
-          </a:solidFill>
-          <a:ln w="6350">
-            <a:solidFill>
-              <a:schemeClr val="accent1"/>
-            </a:solidFill>
-            <a:prstDash val="solid"/>
-          </a:ln>
-        </p:spPr>
-      </p:sp>
-      <p:sp>
-        <p:nvSpPr>
-          <p:cNvPr id="9" name="Text 5"/>
-          <p:cNvSpPr txBox="1"/>
-          <p:nvPr/>
-        </p:nvSpPr>
-        <p:spPr>
-          <a:xfrm>
-            <a:off x="1383762" y="2606040"/>
-            <a:ext cx="548640" cy="548640"/>
-          </a:xfrm>
-          <a:prstGeom prst="rect">
-            <a:avLst/>
-          </a:prstGeom>
-          <a:noFill/>
-          <a:ln/>
-        </p:spPr>
-        <p:txBody>
-          <a:bodyPr wrap="square" lIns="0" tIns="0" rIns="0" bIns="0" rtlCol="0" anchor="ctr"/>
-          <a:lstStyle/>
-          <a:p>
-            <a:pPr algn="ctr" indent="0" marL="0">
-              <a:buNone/>
-            </a:pPr>
-            <a:r>
-              <a:rPr lang="en-US" sz="1600" b="1" dirty="0">
-                <a:solidFill>
-                  <a:schemeClr val="bg1"/>
-                </a:solidFill>
-                <a:latin typeface="Calibri" pitchFamily="34" charset="0"/>
-                <a:ea typeface="Calibri" pitchFamily="34" charset="-122"/>
-                <a:cs typeface="Calibri" pitchFamily="34" charset="-120"/>
-              </a:rPr>
-              <a:t>1</a:t>
-            </a:r>
-            <a:endParaRPr lang="en-US" sz="1600" dirty="0"/>
-          </a:p>
-        </p:txBody>
-      </p:sp>
-      <p:sp>
-        <p:nvSpPr>
-          <p:cNvPr id="10" name="Flow head"/>
-          <p:cNvSpPr txBox="1"/>
-          <p:nvPr/>
-        </p:nvSpPr>
-        <p:spPr>
-          <a:xfrm>
-            <a:off x="621792" y="3291840"/>
-            <a:ext cx="2072579" cy="548640"/>
-          </a:xfrm>
-          <a:prstGeom prst="rect">
-            <a:avLst/>
-          </a:prstGeom>
-          <a:noFill/>
-          <a:ln/>
-        </p:spPr>
-        <p:txBody>
-          <a:bodyPr wrap="square" lIns="0" tIns="0" rIns="0" bIns="0" rtlCol="0" anchor="t"/>
-          <a:lstStyle/>
-          <a:p>
-            <a:pPr algn="ctr" indent="0" marL="0">
-              <a:buNone/>
-            </a:pPr>
-            <a:r>
-              <a:rPr lang="en-US" sz="1600" b="1" dirty="0">
-                <a:solidFill>
-                  <a:schemeClr val="tx1"/>
-                </a:solidFill>
-                <a:latin typeface="Cambria" pitchFamily="34" charset="0"/>
-                <a:ea typeface="Cambria" pitchFamily="34" charset="-122"/>
-                <a:cs typeface="Cambria" pitchFamily="34" charset="-120"/>
-              </a:rPr>
-              <a:t>Read the record</a:t>
-            </a:r>
-            <a:endParaRPr lang="en-US" sz="1600" dirty="0"/>
-          </a:p>
-        </p:txBody>
-      </p:sp>
-      <p:sp>
-        <p:nvSpPr>
-          <p:cNvPr id="11" name="Flow text"/>
-          <p:cNvSpPr txBox="1"/>
-          <p:nvPr/>
-        </p:nvSpPr>
-        <p:spPr>
-          <a:xfrm>
-            <a:off x="640080" y="3867912"/>
-            <a:ext cx="2036003" cy="1554480"/>
-          </a:xfrm>
-          <a:prstGeom prst="rect">
-            <a:avLst/>
-          </a:prstGeom>
-          <a:noFill/>
-          <a:ln/>
-        </p:spPr>
-        <p:txBody>
-          <a:bodyPr wrap="square" lIns="0" tIns="0" rIns="0" bIns="0" rtlCol="0" anchor="t"/>
-          <a:lstStyle/>
-          <a:p>
-            <a:pPr algn="ctr" indent="0" marL="0">
-              <a:buNone/>
-            </a:pPr>
-            <a:r>
-              <a:rPr lang="en-US" sz="1400" dirty="0">
-                <a:solidFill>
-                  <a:schemeClr val="tx2"/>
-                </a:solidFill>
-              </a:rPr>
-              <a:t>Compare readings with and without a closure; compute the ceiling.</a:t>
-            </a:r>
-            <a:endParaRPr lang="en-US" sz="1400" dirty="0"/>
-          </a:p>
-        </p:txBody>
-      </p:sp>
-      <p:sp>
-        <p:nvSpPr>
-          <p:cNvPr id="12" name="Number"/>
-          <p:cNvSpPr/>
-          <p:nvPr/>
-        </p:nvSpPr>
-        <p:spPr>
-          <a:xfrm>
-            <a:off x="3602645" y="2606040"/>
-            <a:ext cx="548640" cy="548640"/>
-          </a:xfrm>
-          <a:prstGeom prst="ellipse">
-            <a:avLst/>
-          </a:prstGeom>
-          <a:solidFill>
-            <a:schemeClr val="accent1"/>
-          </a:solidFill>
-          <a:ln w="6350">
-            <a:solidFill>
-              <a:schemeClr val="accent1"/>
-            </a:solidFill>
-            <a:prstDash val="solid"/>
-          </a:ln>
-        </p:spPr>
-      </p:sp>
-      <p:sp>
-        <p:nvSpPr>
-          <p:cNvPr id="13" name="Text 9"/>
-          <p:cNvSpPr txBox="1"/>
-          <p:nvPr/>
-        </p:nvSpPr>
-        <p:spPr>
-          <a:xfrm>
-            <a:off x="3602645" y="2606040"/>
-            <a:ext cx="548640" cy="548640"/>
-          </a:xfrm>
-          <a:prstGeom prst="rect">
-            <a:avLst/>
-          </a:prstGeom>
-          <a:noFill/>
-          <a:ln/>
-        </p:spPr>
-        <p:txBody>
-          <a:bodyPr wrap="square" lIns="0" tIns="0" rIns="0" bIns="0" rtlCol="0" anchor="ctr"/>
-          <a:lstStyle/>
-          <a:p>
-            <a:pPr algn="ctr" indent="0" marL="0">
-              <a:buNone/>
-            </a:pPr>
-            <a:r>
-              <a:rPr lang="en-US" sz="1600" b="1" dirty="0">
-                <a:solidFill>
-                  <a:schemeClr val="bg1"/>
-                </a:solidFill>
-                <a:latin typeface="Calibri" pitchFamily="34" charset="0"/>
-                <a:ea typeface="Calibri" pitchFamily="34" charset="-122"/>
-                <a:cs typeface="Calibri" pitchFamily="34" charset="-120"/>
-              </a:rPr>
-              <a:t>2</a:t>
-            </a:r>
-            <a:endParaRPr lang="en-US" sz="1600" dirty="0"/>
-          </a:p>
-        </p:txBody>
-      </p:sp>
-      <p:sp>
-        <p:nvSpPr>
-          <p:cNvPr id="14" name="Flow head"/>
-          <p:cNvSpPr txBox="1"/>
-          <p:nvPr/>
-        </p:nvSpPr>
-        <p:spPr>
-          <a:xfrm>
-            <a:off x="2840675" y="3291840"/>
-            <a:ext cx="2072579" cy="548640"/>
-          </a:xfrm>
-          <a:prstGeom prst="rect">
-            <a:avLst/>
-          </a:prstGeom>
-          <a:noFill/>
-          <a:ln/>
-        </p:spPr>
-        <p:txBody>
-          <a:bodyPr wrap="square" lIns="0" tIns="0" rIns="0" bIns="0" rtlCol="0" anchor="t"/>
-          <a:lstStyle/>
-          <a:p>
-            <a:pPr algn="ctr" indent="0" marL="0">
-              <a:buNone/>
-            </a:pPr>
-            <a:r>
-              <a:rPr lang="en-US" sz="1600" b="1" dirty="0">
-                <a:solidFill>
-                  <a:schemeClr val="tx1"/>
-                </a:solidFill>
-                <a:latin typeface="Cambria" pitchFamily="34" charset="0"/>
-                <a:ea typeface="Cambria" pitchFamily="34" charset="-122"/>
-                <a:cs typeface="Cambria" pitchFamily="34" charset="-120"/>
-              </a:rPr>
-              <a:t>Train and validate</a:t>
-            </a:r>
-            <a:endParaRPr lang="en-US" sz="1600" dirty="0"/>
-          </a:p>
-        </p:txBody>
-      </p:sp>
-      <p:sp>
-        <p:nvSpPr>
-          <p:cNvPr id="15" name="Flow text"/>
-          <p:cNvSpPr txBox="1"/>
-          <p:nvPr/>
-        </p:nvSpPr>
-        <p:spPr>
-          <a:xfrm>
-            <a:off x="2858963" y="3867912"/>
-            <a:ext cx="2036003" cy="1554480"/>
-          </a:xfrm>
-          <a:prstGeom prst="rect">
-            <a:avLst/>
-          </a:prstGeom>
-          <a:noFill/>
-          <a:ln/>
-        </p:spPr>
-        <p:txBody>
-          <a:bodyPr wrap="square" lIns="0" tIns="0" rIns="0" bIns="0" rtlCol="0" anchor="t"/>
-          <a:lstStyle/>
-          <a:p>
-            <a:pPr algn="ctr" indent="0" marL="0">
-              <a:buNone/>
-            </a:pPr>
-            <a:r>
-              <a:rPr lang="en-US" sz="1400" dirty="0">
-                <a:solidFill>
-                  <a:schemeClr val="tx2"/>
-                </a:solidFill>
-              </a:rPr>
-              <a:t>Fit a logistic and a boosted model; score them on the record, held-out folds and fresh programs.</a:t>
-            </a:r>
-            <a:endParaRPr lang="en-US" sz="1400" dirty="0"/>
-          </a:p>
-        </p:txBody>
-      </p:sp>
-      <p:sp>
-        <p:nvSpPr>
-          <p:cNvPr id="16" name="Number"/>
-          <p:cNvSpPr/>
-          <p:nvPr/>
-        </p:nvSpPr>
-        <p:spPr>
-          <a:xfrm>
-            <a:off x="5821528" y="2606040"/>
-            <a:ext cx="548640" cy="548640"/>
-          </a:xfrm>
-          <a:prstGeom prst="ellipse">
-            <a:avLst/>
-          </a:prstGeom>
-          <a:solidFill>
-            <a:schemeClr val="accent1"/>
-          </a:solidFill>
-          <a:ln w="6350">
-            <a:solidFill>
-              <a:schemeClr val="accent1"/>
-            </a:solidFill>
-            <a:prstDash val="solid"/>
-          </a:ln>
-        </p:spPr>
-      </p:sp>
-      <p:sp>
-        <p:nvSpPr>
-          <p:cNvPr id="17" name="Text 13"/>
-          <p:cNvSpPr txBox="1"/>
-          <p:nvPr/>
-        </p:nvSpPr>
-        <p:spPr>
-          <a:xfrm>
-            <a:off x="5821528" y="2606040"/>
-            <a:ext cx="548640" cy="548640"/>
-          </a:xfrm>
-          <a:prstGeom prst="rect">
-            <a:avLst/>
-          </a:prstGeom>
-          <a:noFill/>
-          <a:ln/>
-        </p:spPr>
-        <p:txBody>
-          <a:bodyPr wrap="square" lIns="0" tIns="0" rIns="0" bIns="0" rtlCol="0" anchor="ctr"/>
-          <a:lstStyle/>
-          <a:p>
-            <a:pPr algn="ctr" indent="0" marL="0">
-              <a:buNone/>
-            </a:pPr>
-            <a:r>
-              <a:rPr lang="en-US" sz="1600" b="1" dirty="0">
-                <a:solidFill>
-                  <a:schemeClr val="bg1"/>
-                </a:solidFill>
-                <a:latin typeface="Calibri" pitchFamily="34" charset="0"/>
-                <a:ea typeface="Calibri" pitchFamily="34" charset="-122"/>
-                <a:cs typeface="Calibri" pitchFamily="34" charset="-120"/>
-              </a:rPr>
-              <a:t>3</a:t>
-            </a:r>
-            <a:endParaRPr lang="en-US" sz="1600" dirty="0"/>
-          </a:p>
-        </p:txBody>
-      </p:sp>
-      <p:sp>
-        <p:nvSpPr>
-          <p:cNvPr id="18" name="Flow head"/>
-          <p:cNvSpPr txBox="1"/>
-          <p:nvPr/>
-        </p:nvSpPr>
-        <p:spPr>
-          <a:xfrm>
-            <a:off x="5059558" y="3291840"/>
-            <a:ext cx="2072579" cy="548640"/>
-          </a:xfrm>
-          <a:prstGeom prst="rect">
-            <a:avLst/>
-          </a:prstGeom>
-          <a:noFill/>
-          <a:ln/>
-        </p:spPr>
-        <p:txBody>
-          <a:bodyPr wrap="square" lIns="0" tIns="0" rIns="0" bIns="0" rtlCol="0" anchor="t"/>
-          <a:lstStyle/>
-          <a:p>
-            <a:pPr algn="ctr" indent="0" marL="0">
-              <a:buNone/>
-            </a:pPr>
-            <a:r>
-              <a:rPr lang="en-US" sz="1600" b="1" dirty="0">
-                <a:solidFill>
-                  <a:schemeClr val="tx1"/>
-                </a:solidFill>
-                <a:latin typeface="Cambria" pitchFamily="34" charset="0"/>
-                <a:ea typeface="Cambria" pitchFamily="34" charset="-122"/>
-                <a:cs typeface="Cambria" pitchFamily="34" charset="-120"/>
-              </a:rPr>
-              <a:t>Price the warning</a:t>
-            </a:r>
-            <a:endParaRPr lang="en-US" sz="1600" dirty="0"/>
-          </a:p>
-        </p:txBody>
-      </p:sp>
-      <p:sp>
-        <p:nvSpPr>
-          <p:cNvPr id="19" name="Flow text"/>
-          <p:cNvSpPr txBox="1"/>
-          <p:nvPr/>
-        </p:nvSpPr>
-        <p:spPr>
-          <a:xfrm>
-            <a:off x="5077846" y="3867912"/>
-            <a:ext cx="2036003" cy="1554480"/>
-          </a:xfrm>
-          <a:prstGeom prst="rect">
-            <a:avLst/>
-          </a:prstGeom>
-          <a:noFill/>
-          <a:ln/>
-        </p:spPr>
-        <p:txBody>
-          <a:bodyPr wrap="square" lIns="0" tIns="0" rIns="0" bIns="0" rtlCol="0" anchor="t"/>
-          <a:lstStyle/>
-          <a:p>
-            <a:pPr algn="ctr" indent="0" marL="0">
-              <a:buNone/>
-            </a:pPr>
-            <a:r>
-              <a:rPr lang="en-US" sz="1400" dirty="0">
-                <a:solidFill>
-                  <a:schemeClr val="tx2"/>
-                </a:solidFill>
-              </a:rPr>
-              <a:t>Sweep the threshold; mark best accuracy and best value.</a:t>
-            </a:r>
-            <a:endParaRPr lang="en-US" sz="1400" dirty="0"/>
-          </a:p>
-        </p:txBody>
-      </p:sp>
-      <p:sp>
-        <p:nvSpPr>
-          <p:cNvPr id="20" name="Number"/>
-          <p:cNvSpPr/>
-          <p:nvPr/>
-        </p:nvSpPr>
-        <p:spPr>
-          <a:xfrm>
-            <a:off x="8040411" y="2606040"/>
-            <a:ext cx="548640" cy="548640"/>
-          </a:xfrm>
-          <a:prstGeom prst="ellipse">
-            <a:avLst/>
-          </a:prstGeom>
-          <a:solidFill>
-            <a:schemeClr val="accent1"/>
-          </a:solidFill>
-          <a:ln w="6350">
-            <a:solidFill>
-              <a:schemeClr val="accent1"/>
-            </a:solidFill>
-            <a:prstDash val="solid"/>
-          </a:ln>
-        </p:spPr>
-      </p:sp>
-      <p:sp>
-        <p:nvSpPr>
-          <p:cNvPr id="21" name="Text 17"/>
-          <p:cNvSpPr txBox="1"/>
-          <p:nvPr/>
-        </p:nvSpPr>
-        <p:spPr>
-          <a:xfrm>
-            <a:off x="8040411" y="2606040"/>
-            <a:ext cx="548640" cy="548640"/>
-          </a:xfrm>
-          <a:prstGeom prst="rect">
-            <a:avLst/>
-          </a:prstGeom>
-          <a:noFill/>
-          <a:ln/>
-        </p:spPr>
-        <p:txBody>
-          <a:bodyPr wrap="square" lIns="0" tIns="0" rIns="0" bIns="0" rtlCol="0" anchor="ctr"/>
-          <a:lstStyle/>
-          <a:p>
-            <a:pPr algn="ctr" indent="0" marL="0">
-              <a:buNone/>
-            </a:pPr>
-            <a:r>
-              <a:rPr lang="en-US" sz="1600" b="1" dirty="0">
-                <a:solidFill>
-                  <a:schemeClr val="bg1"/>
-                </a:solidFill>
-                <a:latin typeface="Calibri" pitchFamily="34" charset="0"/>
-                <a:ea typeface="Calibri" pitchFamily="34" charset="-122"/>
-                <a:cs typeface="Calibri" pitchFamily="34" charset="-120"/>
-              </a:rPr>
-              <a:t>4</a:t>
-            </a:r>
-            <a:endParaRPr lang="en-US" sz="1600" dirty="0"/>
-          </a:p>
-        </p:txBody>
-      </p:sp>
-      <p:sp>
-        <p:nvSpPr>
-          <p:cNvPr id="22" name="Flow head"/>
-          <p:cNvSpPr txBox="1"/>
-          <p:nvPr/>
-        </p:nvSpPr>
-        <p:spPr>
-          <a:xfrm>
-            <a:off x="7278441" y="3291840"/>
-            <a:ext cx="2072579" cy="548640"/>
-          </a:xfrm>
-          <a:prstGeom prst="rect">
-            <a:avLst/>
-          </a:prstGeom>
-          <a:noFill/>
-          <a:ln/>
-        </p:spPr>
-        <p:txBody>
-          <a:bodyPr wrap="square" lIns="0" tIns="0" rIns="0" bIns="0" rtlCol="0" anchor="t"/>
-          <a:lstStyle/>
-          <a:p>
-            <a:pPr algn="ctr" indent="0" marL="0">
-              <a:buNone/>
-            </a:pPr>
-            <a:r>
-              <a:rPr lang="en-US" sz="1600" b="1" dirty="0">
-                <a:solidFill>
-                  <a:schemeClr val="tx1"/>
-                </a:solidFill>
-                <a:latin typeface="Cambria" pitchFamily="34" charset="0"/>
-                <a:ea typeface="Cambria" pitchFamily="34" charset="-122"/>
-                <a:cs typeface="Cambria" pitchFamily="34" charset="-120"/>
-              </a:rPr>
-              <a:t>Check and certify</a:t>
-            </a:r>
-            <a:endParaRPr lang="en-US" sz="1600" dirty="0"/>
-          </a:p>
-        </p:txBody>
-      </p:sp>
-      <p:sp>
-        <p:nvSpPr>
-          <p:cNvPr id="23" name="Flow text"/>
-          <p:cNvSpPr txBox="1"/>
-          <p:nvPr/>
-        </p:nvSpPr>
-        <p:spPr>
-          <a:xfrm>
-            <a:off x="7296729" y="3867912"/>
-            <a:ext cx="2036003" cy="1554480"/>
-          </a:xfrm>
-          <a:prstGeom prst="rect">
-            <a:avLst/>
-          </a:prstGeom>
-          <a:noFill/>
-          <a:ln/>
-        </p:spPr>
-        <p:txBody>
-          <a:bodyPr wrap="square" lIns="0" tIns="0" rIns="0" bIns="0" rtlCol="0" anchor="t"/>
-          <a:lstStyle/>
-          <a:p>
-            <a:pPr algn="ctr" indent="0" marL="0">
-              <a:buNone/>
-            </a:pPr>
-            <a:r>
-              <a:rPr lang="en-US" sz="1400" dirty="0">
-                <a:solidFill>
-                  <a:schemeClr val="tx2"/>
-                </a:solidFill>
-              </a:rPr>
-              <a:t>Trusted, held-out and certified designs on fresh paths; repeat on 200 records.</a:t>
-            </a:r>
-            <a:endParaRPr lang="en-US" sz="1400" dirty="0"/>
-          </a:p>
-        </p:txBody>
-      </p:sp>
-      <p:sp>
-        <p:nvSpPr>
-          <p:cNvPr id="24" name="Number"/>
-          <p:cNvSpPr/>
-          <p:nvPr/>
-        </p:nvSpPr>
-        <p:spPr>
-          <a:xfrm>
-            <a:off x="10259294" y="2606040"/>
-            <a:ext cx="548640" cy="548640"/>
-          </a:xfrm>
-          <a:prstGeom prst="ellipse">
-            <a:avLst/>
-          </a:prstGeom>
-          <a:solidFill>
-            <a:schemeClr val="accent1"/>
-          </a:solidFill>
-          <a:ln w="6350">
-            <a:solidFill>
-              <a:schemeClr val="accent1"/>
-            </a:solidFill>
-            <a:prstDash val="solid"/>
-          </a:ln>
-        </p:spPr>
-      </p:sp>
-      <p:sp>
-        <p:nvSpPr>
-          <p:cNvPr id="25" name="Text 21"/>
-          <p:cNvSpPr txBox="1"/>
-          <p:nvPr/>
-        </p:nvSpPr>
-        <p:spPr>
-          <a:xfrm>
-            <a:off x="10259294" y="2606040"/>
-            <a:ext cx="548640" cy="548640"/>
-          </a:xfrm>
-          <a:prstGeom prst="rect">
-            <a:avLst/>
-          </a:prstGeom>
-          <a:noFill/>
-          <a:ln/>
-        </p:spPr>
-        <p:txBody>
-          <a:bodyPr wrap="square" lIns="0" tIns="0" rIns="0" bIns="0" rtlCol="0" anchor="ctr"/>
-          <a:lstStyle/>
-          <a:p>
-            <a:pPr algn="ctr" indent="0" marL="0">
-              <a:buNone/>
-            </a:pPr>
-            <a:r>
-              <a:rPr lang="en-US" sz="1600" b="1" dirty="0">
-                <a:solidFill>
-                  <a:schemeClr val="bg1"/>
-                </a:solidFill>
-                <a:latin typeface="Calibri" pitchFamily="34" charset="0"/>
-                <a:ea typeface="Calibri" pitchFamily="34" charset="-122"/>
-                <a:cs typeface="Calibri" pitchFamily="34" charset="-120"/>
-              </a:rPr>
-              <a:t>5</a:t>
-            </a:r>
-            <a:endParaRPr lang="en-US" sz="1600" dirty="0"/>
-          </a:p>
-        </p:txBody>
-      </p:sp>
-      <p:sp>
-        <p:nvSpPr>
-          <p:cNvPr id="26" name="Flow head"/>
-          <p:cNvSpPr txBox="1"/>
-          <p:nvPr/>
-        </p:nvSpPr>
-        <p:spPr>
-          <a:xfrm>
-            <a:off x="9497324" y="3291840"/>
-            <a:ext cx="2072579" cy="548640"/>
-          </a:xfrm>
-          <a:prstGeom prst="rect">
-            <a:avLst/>
-          </a:prstGeom>
-          <a:noFill/>
-          <a:ln/>
-        </p:spPr>
-        <p:txBody>
-          <a:bodyPr wrap="square" lIns="0" tIns="0" rIns="0" bIns="0" rtlCol="0" anchor="t"/>
-          <a:lstStyle/>
-          <a:p>
-            <a:pPr algn="ctr" indent="0" marL="0">
-              <a:buNone/>
-            </a:pPr>
-            <a:r>
-              <a:rPr lang="en-US" sz="1600" b="1" dirty="0">
-                <a:solidFill>
-                  <a:schemeClr val="tx1"/>
-                </a:solidFill>
-                <a:latin typeface="Cambria" pitchFamily="34" charset="0"/>
-                <a:ea typeface="Cambria" pitchFamily="34" charset="-122"/>
-                <a:cs typeface="Cambria" pitchFamily="34" charset="-120"/>
-              </a:rPr>
-              <a:t>Compress and explain</a:t>
-            </a:r>
-            <a:endParaRPr lang="en-US" sz="1600" dirty="0"/>
-          </a:p>
-        </p:txBody>
-      </p:sp>
-      <p:sp>
-        <p:nvSpPr>
-          <p:cNvPr id="27" name="Flow text"/>
-          <p:cNvSpPr txBox="1"/>
-          <p:nvPr/>
-        </p:nvSpPr>
-        <p:spPr>
-          <a:xfrm>
-            <a:off x="9515612" y="3867912"/>
-            <a:ext cx="2036003" cy="1554480"/>
-          </a:xfrm>
-          <a:prstGeom prst="rect">
-            <a:avLst/>
-          </a:prstGeom>
-          <a:noFill/>
-          <a:ln/>
-        </p:spPr>
-        <p:txBody>
-          <a:bodyPr wrap="square" lIns="0" tIns="0" rIns="0" bIns="0" rtlCol="0" anchor="t"/>
-          <a:lstStyle/>
-          <a:p>
-            <a:pPr algn="ctr" indent="0" marL="0">
-              <a:buNone/>
-            </a:pPr>
-            <a:r>
-              <a:rPr lang="en-US" sz="1400" dirty="0">
-                <a:solidFill>
-                  <a:schemeClr val="tx2"/>
-                </a:solidFill>
-              </a:rPr>
-              <a:t>Price one index and subsets; compare two games of attribution.</a:t>
-            </a:r>
-            <a:endParaRPr lang="en-US" sz="1400" dirty="0"/>
-          </a:p>
-        </p:txBody>
-      </p:sp>
-      <p:sp>
-        <p:nvSpPr>
-          <p:cNvPr id="28" name="Deliverable card"/>
-          <p:cNvSpPr/>
-          <p:nvPr/>
-        </p:nvSpPr>
-        <p:spPr>
-          <a:xfrm>
-            <a:off x="548640" y="5486400"/>
-            <a:ext cx="11094415" cy="685800"/>
+            <a:off x="548640" y="1691640"/>
+            <a:ext cx="3515258" cy="2103120"/>
           </a:xfrm>
           <a:prstGeom prst="roundRect">
             <a:avLst>
-              <a:gd name="adj" fmla="val 10667"/>
+              <a:gd name="adj" fmla="val 3478"/>
             </a:avLst>
           </a:prstGeom>
           <a:solidFill>
@@ -15940,14 +15256,14 @@
       </p:sp>
       <p:sp>
         <p:nvSpPr>
-          <p:cNvPr id="29" name="Deliverable"/>
+          <p:cNvPr id="6" name="Card label"/>
           <p:cNvSpPr txBox="1"/>
           <p:nvPr/>
         </p:nvSpPr>
         <p:spPr>
           <a:xfrm>
-            <a:off x="777240" y="5559552"/>
-            <a:ext cx="10637215" cy="539496"/>
+            <a:off x="731520" y="1819656"/>
+            <a:ext cx="3149498" cy="310896"/>
           </a:xfrm>
           <a:prstGeom prst="rect">
             <a:avLst/>
@@ -15963,22 +15279,779 @@
               <a:buNone/>
             </a:pPr>
             <a:r>
-              <a:rPr lang="en-US" sz="1400" b="1" dirty="0">
+              <a:rPr lang="en-US" sz="1300" b="1" dirty="0">
+                <a:solidFill>
+                  <a:schemeClr val="accent1"/>
+                </a:solidFill>
+              </a:rPr>
+              <a:t>The decision</a:t>
+            </a:r>
+            <a:endParaRPr lang="en-US" sz="1300" dirty="0"/>
+          </a:p>
+        </p:txBody>
+      </p:sp>
+      <p:sp>
+        <p:nvSpPr>
+          <p:cNvPr id="7" name="Card head"/>
+          <p:cNvSpPr txBox="1"/>
+          <p:nvPr/>
+        </p:nvSpPr>
+        <p:spPr>
+          <a:xfrm>
+            <a:off x="731520" y="2148840"/>
+            <a:ext cx="3149498" cy="576072"/>
+          </a:xfrm>
+          <a:prstGeom prst="rect">
+            <a:avLst/>
+          </a:prstGeom>
+          <a:noFill/>
+          <a:ln/>
+        </p:spPr>
+        <p:txBody>
+          <a:bodyPr wrap="square" lIns="0" tIns="0" rIns="0" bIns="0" rtlCol="0" anchor="t"/>
+          <a:lstStyle/>
+          <a:p>
+            <a:pPr indent="0" marL="0">
+              <a:buNone/>
+            </a:pPr>
+            <a:r>
+              <a:rPr lang="en-US" sz="1600" b="1" dirty="0">
                 <a:solidFill>
                   <a:schemeClr val="tx1"/>
                 </a:solidFill>
-              </a:rPr>
-              <a:t>Deliverable:</a:t>
-            </a:r>
-            <a:r>
-              <a:rPr lang="en-US" sz="1400" dirty="0">
+                <a:latin typeface="Cambria" pitchFamily="34" charset="0"/>
+                <a:ea typeface="Cambria" pitchFamily="34" charset="-122"/>
+                <a:cs typeface="Cambria" pitchFamily="34" charset="-120"/>
+              </a:rPr>
+              <a:t>Is better accuracy worth $1m?</a:t>
+            </a:r>
+            <a:endParaRPr lang="en-US" sz="1600" dirty="0"/>
+          </a:p>
+        </p:txBody>
+      </p:sp>
+      <p:sp>
+        <p:nvSpPr>
+          <p:cNvPr id="8" name="Card text"/>
+          <p:cNvSpPr txBox="1"/>
+          <p:nvPr/>
+        </p:nvSpPr>
+        <p:spPr>
+          <a:xfrm>
+            <a:off x="731520" y="2798064"/>
+            <a:ext cx="3149498" cy="868680"/>
+          </a:xfrm>
+          <a:prstGeom prst="rect">
+            <a:avLst/>
+          </a:prstGeom>
+          <a:noFill/>
+          <a:ln/>
+        </p:spPr>
+        <p:txBody>
+          <a:bodyPr wrap="square" lIns="0" tIns="0" rIns="0" bIns="0" rtlCol="0" anchor="t"/>
+          <a:lstStyle/>
+          <a:p>
+            <a:pPr indent="0" marL="0">
+              <a:buNone/>
+            </a:pPr>
+            <a:r>
+              <a:rPr lang="en-US" sz="1300" dirty="0">
+                <a:solidFill>
+                  <a:schemeClr val="tx2"/>
+                </a:solidFill>
+              </a:rPr>
+              <a:t>A 10 percent cut in rating-prediction error over Cinematch, judged on data the teams never saw.</a:t>
+            </a:r>
+            <a:endParaRPr lang="en-US" sz="1300" dirty="0"/>
+          </a:p>
+        </p:txBody>
+      </p:sp>
+      <p:sp>
+        <p:nvSpPr>
+          <p:cNvPr id="9" name="Card"/>
+          <p:cNvSpPr/>
+          <p:nvPr/>
+        </p:nvSpPr>
+        <p:spPr>
+          <a:xfrm>
+            <a:off x="4338218" y="1691640"/>
+            <a:ext cx="3515258" cy="2103120"/>
+          </a:xfrm>
+          <a:prstGeom prst="roundRect">
+            <a:avLst>
+              <a:gd name="adj" fmla="val 3478"/>
+            </a:avLst>
+          </a:prstGeom>
+          <a:solidFill>
+            <a:schemeClr val="bg2"/>
+          </a:solidFill>
+          <a:ln w="9525">
+            <a:solidFill>
+              <a:srgbClr val="C4CBD8"/>
+            </a:solidFill>
+            <a:prstDash val="solid"/>
+          </a:ln>
+        </p:spPr>
+      </p:sp>
+      <p:sp>
+        <p:nvSpPr>
+          <p:cNvPr id="10" name="Card label"/>
+          <p:cNvSpPr txBox="1"/>
+          <p:nvPr/>
+        </p:nvSpPr>
+        <p:spPr>
+          <a:xfrm>
+            <a:off x="4521098" y="1819656"/>
+            <a:ext cx="3149498" cy="310896"/>
+          </a:xfrm>
+          <a:prstGeom prst="rect">
+            <a:avLst/>
+          </a:prstGeom>
+          <a:noFill/>
+          <a:ln/>
+        </p:spPr>
+        <p:txBody>
+          <a:bodyPr wrap="square" lIns="0" tIns="0" rIns="0" bIns="0" rtlCol="0" anchor="ctr"/>
+          <a:lstStyle/>
+          <a:p>
+            <a:pPr indent="0" marL="0">
+              <a:buNone/>
+            </a:pPr>
+            <a:r>
+              <a:rPr lang="en-US" sz="1300" b="1" dirty="0">
+                <a:solidFill>
+                  <a:schemeClr val="accent1"/>
+                </a:solidFill>
+              </a:rPr>
+              <a:t>The method</a:t>
+            </a:r>
+            <a:endParaRPr lang="en-US" sz="1300" dirty="0"/>
+          </a:p>
+        </p:txBody>
+      </p:sp>
+      <p:sp>
+        <p:nvSpPr>
+          <p:cNvPr id="11" name="Card head"/>
+          <p:cNvSpPr txBox="1"/>
+          <p:nvPr/>
+        </p:nvSpPr>
+        <p:spPr>
+          <a:xfrm>
+            <a:off x="4521098" y="2148840"/>
+            <a:ext cx="3149498" cy="576072"/>
+          </a:xfrm>
+          <a:prstGeom prst="rect">
+            <a:avLst/>
+          </a:prstGeom>
+          <a:noFill/>
+          <a:ln/>
+        </p:spPr>
+        <p:txBody>
+          <a:bodyPr wrap="square" lIns="0" tIns="0" rIns="0" bIns="0" rtlCol="0" anchor="t"/>
+          <a:lstStyle/>
+          <a:p>
+            <a:pPr indent="0" marL="0">
+              <a:buNone/>
+            </a:pPr>
+            <a:r>
+              <a:rPr lang="en-US" sz="1600" b="1" dirty="0">
                 <a:solidFill>
                   <a:schemeClr val="tx1"/>
                 </a:solidFill>
-              </a:rPr>
-              <a:t> a one-page note to the board: what the warning can be worth, the threshold and packages it should use, its certified value and fresh check, and what the desk should record next. About 75 minutes.</a:t>
-            </a:r>
-            <a:endParaRPr lang="en-US" sz="1400" dirty="0"/>
+                <a:latin typeface="Cambria" pitchFamily="34" charset="0"/>
+                <a:ea typeface="Cambria" pitchFamily="34" charset="-122"/>
+                <a:cs typeface="Cambria" pitchFamily="34" charset="-120"/>
+              </a:rPr>
+              <a:t>A hidden test set</a:t>
+            </a:r>
+            <a:endParaRPr lang="en-US" sz="1600" dirty="0"/>
+          </a:p>
+        </p:txBody>
+      </p:sp>
+      <p:sp>
+        <p:nvSpPr>
+          <p:cNvPr id="12" name="Card text"/>
+          <p:cNvSpPr txBox="1"/>
+          <p:nvPr/>
+        </p:nvSpPr>
+        <p:spPr>
+          <a:xfrm>
+            <a:off x="4521098" y="2798064"/>
+            <a:ext cx="3149498" cy="868680"/>
+          </a:xfrm>
+          <a:prstGeom prst="rect">
+            <a:avLst/>
+          </a:prstGeom>
+          <a:noFill/>
+          <a:ln/>
+        </p:spPr>
+        <p:txBody>
+          <a:bodyPr wrap="square" lIns="0" tIns="0" rIns="0" bIns="0" rtlCol="0" anchor="t"/>
+          <a:lstStyle/>
+          <a:p>
+            <a:pPr indent="0" marL="0">
+              <a:buNone/>
+            </a:pPr>
+            <a:r>
+              <a:rPr lang="en-US" sz="1300" dirty="0">
+                <a:solidFill>
+                  <a:schemeClr val="tx2"/>
+                </a:solidFill>
+              </a:rPr>
+              <a:t>A public leaderboard on half the withheld ratings; the prize decided on the other half.</a:t>
+            </a:r>
+            <a:endParaRPr lang="en-US" sz="1300" dirty="0"/>
+          </a:p>
+        </p:txBody>
+      </p:sp>
+      <p:sp>
+        <p:nvSpPr>
+          <p:cNvPr id="13" name="Card"/>
+          <p:cNvSpPr/>
+          <p:nvPr/>
+        </p:nvSpPr>
+        <p:spPr>
+          <a:xfrm>
+            <a:off x="8127797" y="1691640"/>
+            <a:ext cx="3515258" cy="2103120"/>
+          </a:xfrm>
+          <a:prstGeom prst="roundRect">
+            <a:avLst>
+              <a:gd name="adj" fmla="val 3478"/>
+            </a:avLst>
+          </a:prstGeom>
+          <a:solidFill>
+            <a:schemeClr val="tx1"/>
+          </a:solidFill>
+          <a:ln w="9525">
+            <a:solidFill>
+              <a:srgbClr val="0F1E3D"/>
+            </a:solidFill>
+            <a:prstDash val="solid"/>
+          </a:ln>
+        </p:spPr>
+      </p:sp>
+      <p:sp>
+        <p:nvSpPr>
+          <p:cNvPr id="14" name="Card label"/>
+          <p:cNvSpPr txBox="1"/>
+          <p:nvPr/>
+        </p:nvSpPr>
+        <p:spPr>
+          <a:xfrm>
+            <a:off x="8310677" y="1819656"/>
+            <a:ext cx="3149498" cy="310896"/>
+          </a:xfrm>
+          <a:prstGeom prst="rect">
+            <a:avLst/>
+          </a:prstGeom>
+          <a:noFill/>
+          <a:ln/>
+        </p:spPr>
+        <p:txBody>
+          <a:bodyPr wrap="square" lIns="0" tIns="0" rIns="0" bIns="0" rtlCol="0" anchor="ctr"/>
+          <a:lstStyle/>
+          <a:p>
+            <a:pPr indent="0" marL="0">
+              <a:buNone/>
+            </a:pPr>
+            <a:r>
+              <a:rPr lang="en-US" sz="1300" b="1" dirty="0">
+                <a:solidFill>
+                  <a:schemeClr val="accent1"/>
+                </a:solidFill>
+              </a:rPr>
+              <a:t>The result</a:t>
+            </a:r>
+            <a:endParaRPr lang="en-US" sz="1300" dirty="0"/>
+          </a:p>
+        </p:txBody>
+      </p:sp>
+      <p:sp>
+        <p:nvSpPr>
+          <p:cNvPr id="15" name="Card head"/>
+          <p:cNvSpPr txBox="1"/>
+          <p:nvPr/>
+        </p:nvSpPr>
+        <p:spPr>
+          <a:xfrm>
+            <a:off x="8310677" y="2148840"/>
+            <a:ext cx="3149498" cy="576072"/>
+          </a:xfrm>
+          <a:prstGeom prst="rect">
+            <a:avLst/>
+          </a:prstGeom>
+          <a:noFill/>
+          <a:ln/>
+        </p:spPr>
+        <p:txBody>
+          <a:bodyPr wrap="square" lIns="0" tIns="0" rIns="0" bIns="0" rtlCol="0" anchor="t"/>
+          <a:lstStyle/>
+          <a:p>
+            <a:pPr indent="0" marL="0">
+              <a:buNone/>
+            </a:pPr>
+            <a:r>
+              <a:rPr lang="en-US" sz="1600" b="1" dirty="0">
+                <a:solidFill>
+                  <a:schemeClr val="bg1"/>
+                </a:solidFill>
+                <a:latin typeface="Cambria" pitchFamily="34" charset="0"/>
+                <a:ea typeface="Cambria" pitchFamily="34" charset="-122"/>
+                <a:cs typeface="Cambria" pitchFamily="34" charset="-120"/>
+              </a:rPr>
+              <a:t>Won in 2009, not deployed</a:t>
+            </a:r>
+            <a:endParaRPr lang="en-US" sz="1600" dirty="0"/>
+          </a:p>
+        </p:txBody>
+      </p:sp>
+      <p:sp>
+        <p:nvSpPr>
+          <p:cNvPr id="16" name="Card text"/>
+          <p:cNvSpPr txBox="1"/>
+          <p:nvPr/>
+        </p:nvSpPr>
+        <p:spPr>
+          <a:xfrm>
+            <a:off x="8310677" y="2798064"/>
+            <a:ext cx="3149498" cy="868680"/>
+          </a:xfrm>
+          <a:prstGeom prst="rect">
+            <a:avLst/>
+          </a:prstGeom>
+          <a:noFill/>
+          <a:ln/>
+        </p:spPr>
+        <p:txBody>
+          <a:bodyPr wrap="square" lIns="0" tIns="0" rIns="0" bIns="0" rtlCol="0" anchor="t"/>
+          <a:lstStyle/>
+          <a:p>
+            <a:pPr indent="0" marL="0">
+              <a:buNone/>
+            </a:pPr>
+            <a:r>
+              <a:rPr lang="en-US" sz="1300" dirty="0">
+                <a:solidFill>
+                  <a:schemeClr val="bg2"/>
+                </a:solidFill>
+              </a:rPr>
+              <a:t>Two 2007 methods went into production; the final blend's gains did not justify the engineering.</a:t>
+            </a:r>
+            <a:endParaRPr lang="en-US" sz="1300" dirty="0"/>
+          </a:p>
+        </p:txBody>
+      </p:sp>
+      <p:sp>
+        <p:nvSpPr>
+          <p:cNvPr id="17" name="Card"/>
+          <p:cNvSpPr/>
+          <p:nvPr/>
+        </p:nvSpPr>
+        <p:spPr>
+          <a:xfrm>
+            <a:off x="548640" y="4069080"/>
+            <a:ext cx="3515258" cy="2103120"/>
+          </a:xfrm>
+          <a:prstGeom prst="roundRect">
+            <a:avLst>
+              <a:gd name="adj" fmla="val 3478"/>
+            </a:avLst>
+          </a:prstGeom>
+          <a:solidFill>
+            <a:schemeClr val="bg2"/>
+          </a:solidFill>
+          <a:ln w="9525">
+            <a:solidFill>
+              <a:srgbClr val="C4CBD8"/>
+            </a:solidFill>
+            <a:prstDash val="solid"/>
+          </a:ln>
+        </p:spPr>
+      </p:sp>
+      <p:sp>
+        <p:nvSpPr>
+          <p:cNvPr id="18" name="Card label"/>
+          <p:cNvSpPr txBox="1"/>
+          <p:nvPr/>
+        </p:nvSpPr>
+        <p:spPr>
+          <a:xfrm>
+            <a:off x="731520" y="4197096"/>
+            <a:ext cx="3149498" cy="310896"/>
+          </a:xfrm>
+          <a:prstGeom prst="rect">
+            <a:avLst/>
+          </a:prstGeom>
+          <a:noFill/>
+          <a:ln/>
+        </p:spPr>
+        <p:txBody>
+          <a:bodyPr wrap="square" lIns="0" tIns="0" rIns="0" bIns="0" rtlCol="0" anchor="ctr"/>
+          <a:lstStyle/>
+          <a:p>
+            <a:pPr indent="0" marL="0">
+              <a:buNone/>
+            </a:pPr>
+            <a:r>
+              <a:rPr lang="en-US" sz="1300" b="1" dirty="0">
+                <a:solidFill>
+                  <a:schemeClr val="accent1"/>
+                </a:solidFill>
+              </a:rPr>
+              <a:t>Making it work</a:t>
+            </a:r>
+            <a:endParaRPr lang="en-US" sz="1300" dirty="0"/>
+          </a:p>
+        </p:txBody>
+      </p:sp>
+      <p:sp>
+        <p:nvSpPr>
+          <p:cNvPr id="19" name="Card head"/>
+          <p:cNvSpPr txBox="1"/>
+          <p:nvPr/>
+        </p:nvSpPr>
+        <p:spPr>
+          <a:xfrm>
+            <a:off x="731520" y="4526280"/>
+            <a:ext cx="3149498" cy="576072"/>
+          </a:xfrm>
+          <a:prstGeom prst="rect">
+            <a:avLst/>
+          </a:prstGeom>
+          <a:noFill/>
+          <a:ln/>
+        </p:spPr>
+        <p:txBody>
+          <a:bodyPr wrap="square" lIns="0" tIns="0" rIns="0" bIns="0" rtlCol="0" anchor="t"/>
+          <a:lstStyle/>
+          <a:p>
+            <a:pPr indent="0" marL="0">
+              <a:buNone/>
+            </a:pPr>
+            <a:r>
+              <a:rPr lang="en-US" sz="1600" b="1" dirty="0">
+                <a:solidFill>
+                  <a:schemeClr val="tx1"/>
+                </a:solidFill>
+                <a:latin typeface="Cambria" pitchFamily="34" charset="0"/>
+                <a:ea typeface="Cambria" pitchFamily="34" charset="-122"/>
+                <a:cs typeface="Cambria" pitchFamily="34" charset="-120"/>
+              </a:rPr>
+              <a:t>The objective moved</a:t>
+            </a:r>
+            <a:endParaRPr lang="en-US" sz="1600" dirty="0"/>
+          </a:p>
+        </p:txBody>
+      </p:sp>
+      <p:sp>
+        <p:nvSpPr>
+          <p:cNvPr id="20" name="Card text"/>
+          <p:cNvSpPr txBox="1"/>
+          <p:nvPr/>
+        </p:nvSpPr>
+        <p:spPr>
+          <a:xfrm>
+            <a:off x="731520" y="5175504"/>
+            <a:ext cx="3149498" cy="868680"/>
+          </a:xfrm>
+          <a:prstGeom prst="rect">
+            <a:avLst/>
+          </a:prstGeom>
+          <a:noFill/>
+          <a:ln/>
+        </p:spPr>
+        <p:txBody>
+          <a:bodyPr wrap="square" lIns="0" tIns="0" rIns="0" bIns="0" rtlCol="0" anchor="t"/>
+          <a:lstStyle/>
+          <a:p>
+            <a:pPr indent="0" marL="0">
+              <a:buNone/>
+            </a:pPr>
+            <a:r>
+              <a:rPr lang="en-US" sz="1300" dirty="0">
+                <a:solidFill>
+                  <a:schemeClr val="tx2"/>
+                </a:solidFill>
+              </a:rPr>
+              <a:t>Streaming changed what mattered; engagement and retention, tested in experiments, decide.</a:t>
+            </a:r>
+            <a:endParaRPr lang="en-US" sz="1300" dirty="0"/>
+          </a:p>
+        </p:txBody>
+      </p:sp>
+      <p:sp>
+        <p:nvSpPr>
+          <p:cNvPr id="21" name="Card"/>
+          <p:cNvSpPr/>
+          <p:nvPr/>
+        </p:nvSpPr>
+        <p:spPr>
+          <a:xfrm>
+            <a:off x="4338218" y="4069080"/>
+            <a:ext cx="3515258" cy="2103120"/>
+          </a:xfrm>
+          <a:prstGeom prst="roundRect">
+            <a:avLst>
+              <a:gd name="adj" fmla="val 3478"/>
+            </a:avLst>
+          </a:prstGeom>
+          <a:solidFill>
+            <a:schemeClr val="bg2"/>
+          </a:solidFill>
+          <a:ln w="9525">
+            <a:solidFill>
+              <a:srgbClr val="C4CBD8"/>
+            </a:solidFill>
+            <a:prstDash val="solid"/>
+          </a:ln>
+        </p:spPr>
+      </p:sp>
+      <p:sp>
+        <p:nvSpPr>
+          <p:cNvPr id="22" name="Card label"/>
+          <p:cNvSpPr txBox="1"/>
+          <p:nvPr/>
+        </p:nvSpPr>
+        <p:spPr>
+          <a:xfrm>
+            <a:off x="4521098" y="4197096"/>
+            <a:ext cx="3149498" cy="310896"/>
+          </a:xfrm>
+          <a:prstGeom prst="rect">
+            <a:avLst/>
+          </a:prstGeom>
+          <a:noFill/>
+          <a:ln/>
+        </p:spPr>
+        <p:txBody>
+          <a:bodyPr wrap="square" lIns="0" tIns="0" rIns="0" bIns="0" rtlCol="0" anchor="ctr"/>
+          <a:lstStyle/>
+          <a:p>
+            <a:pPr indent="0" marL="0">
+              <a:buNone/>
+            </a:pPr>
+            <a:r>
+              <a:rPr lang="en-US" sz="1300" b="1" dirty="0">
+                <a:solidFill>
+                  <a:schemeClr val="accent1"/>
+                </a:solidFill>
+              </a:rPr>
+              <a:t>What Meridian takes</a:t>
+            </a:r>
+            <a:endParaRPr lang="en-US" sz="1300" dirty="0"/>
+          </a:p>
+        </p:txBody>
+      </p:sp>
+      <p:sp>
+        <p:nvSpPr>
+          <p:cNvPr id="23" name="Card head"/>
+          <p:cNvSpPr txBox="1"/>
+          <p:nvPr/>
+        </p:nvSpPr>
+        <p:spPr>
+          <a:xfrm>
+            <a:off x="4521098" y="4526280"/>
+            <a:ext cx="3149498" cy="576072"/>
+          </a:xfrm>
+          <a:prstGeom prst="rect">
+            <a:avLst/>
+          </a:prstGeom>
+          <a:noFill/>
+          <a:ln/>
+        </p:spPr>
+        <p:txBody>
+          <a:bodyPr wrap="square" lIns="0" tIns="0" rIns="0" bIns="0" rtlCol="0" anchor="t"/>
+          <a:lstStyle/>
+          <a:p>
+            <a:pPr indent="0" marL="0">
+              <a:buNone/>
+            </a:pPr>
+            <a:r>
+              <a:rPr lang="en-US" sz="1600" b="1" dirty="0">
+                <a:solidFill>
+                  <a:schemeClr val="tx1"/>
+                </a:solidFill>
+                <a:latin typeface="Cambria" pitchFamily="34" charset="0"/>
+                <a:ea typeface="Cambria" pitchFamily="34" charset="-122"/>
+                <a:cs typeface="Cambria" pitchFamily="34" charset="-120"/>
+              </a:rPr>
+              <a:t>Value a warning by decisions</a:t>
+            </a:r>
+            <a:endParaRPr lang="en-US" sz="1600" dirty="0"/>
+          </a:p>
+        </p:txBody>
+      </p:sp>
+      <p:sp>
+        <p:nvSpPr>
+          <p:cNvPr id="24" name="Card text"/>
+          <p:cNvSpPr txBox="1"/>
+          <p:nvPr/>
+        </p:nvSpPr>
+        <p:spPr>
+          <a:xfrm>
+            <a:off x="4521098" y="5175504"/>
+            <a:ext cx="3149498" cy="868680"/>
+          </a:xfrm>
+          <a:prstGeom prst="rect">
+            <a:avLst/>
+          </a:prstGeom>
+          <a:noFill/>
+          <a:ln/>
+        </p:spPr>
+        <p:txBody>
+          <a:bodyPr wrap="square" lIns="0" tIns="0" rIns="0" bIns="0" rtlCol="0" anchor="t"/>
+          <a:lstStyle/>
+          <a:p>
+            <a:pPr indent="0" marL="0">
+              <a:buNone/>
+            </a:pPr>
+            <a:r>
+              <a:rPr lang="en-US" sz="1300" dirty="0">
+                <a:solidFill>
+                  <a:schemeClr val="tx2"/>
+                </a:solidFill>
+              </a:rPr>
+              <a:t>Worked Example 13.1 values the desk's warning by what it does to the liquidity packages.</a:t>
+            </a:r>
+            <a:endParaRPr lang="en-US" sz="1300" dirty="0"/>
+          </a:p>
+        </p:txBody>
+      </p:sp>
+      <p:sp>
+        <p:nvSpPr>
+          <p:cNvPr id="25" name="Card"/>
+          <p:cNvSpPr/>
+          <p:nvPr/>
+        </p:nvSpPr>
+        <p:spPr>
+          <a:xfrm>
+            <a:off x="8127797" y="4069080"/>
+            <a:ext cx="3515258" cy="2103120"/>
+          </a:xfrm>
+          <a:prstGeom prst="roundRect">
+            <a:avLst>
+              <a:gd name="adj" fmla="val 3478"/>
+            </a:avLst>
+          </a:prstGeom>
+          <a:solidFill>
+            <a:schemeClr val="bg2"/>
+          </a:solidFill>
+          <a:ln w="9525">
+            <a:solidFill>
+              <a:srgbClr val="C4CBD8"/>
+            </a:solidFill>
+            <a:prstDash val="solid"/>
+          </a:ln>
+        </p:spPr>
+      </p:sp>
+      <p:sp>
+        <p:nvSpPr>
+          <p:cNvPr id="26" name="Card label"/>
+          <p:cNvSpPr txBox="1"/>
+          <p:nvPr/>
+        </p:nvSpPr>
+        <p:spPr>
+          <a:xfrm>
+            <a:off x="8310677" y="4197096"/>
+            <a:ext cx="3149498" cy="310896"/>
+          </a:xfrm>
+          <a:prstGeom prst="rect">
+            <a:avLst/>
+          </a:prstGeom>
+          <a:noFill/>
+          <a:ln/>
+        </p:spPr>
+        <p:txBody>
+          <a:bodyPr wrap="square" lIns="0" tIns="0" rIns="0" bIns="0" rtlCol="0" anchor="ctr"/>
+          <a:lstStyle/>
+          <a:p>
+            <a:pPr indent="0" marL="0">
+              <a:buNone/>
+            </a:pPr>
+            <a:r>
+              <a:rPr lang="en-US" sz="1300" b="1" dirty="0">
+                <a:solidFill>
+                  <a:schemeClr val="accent1"/>
+                </a:solidFill>
+              </a:rPr>
+              <a:t>For the board</a:t>
+            </a:r>
+            <a:endParaRPr lang="en-US" sz="1300" dirty="0"/>
+          </a:p>
+        </p:txBody>
+      </p:sp>
+      <p:sp>
+        <p:nvSpPr>
+          <p:cNvPr id="27" name="Card head"/>
+          <p:cNvSpPr txBox="1"/>
+          <p:nvPr/>
+        </p:nvSpPr>
+        <p:spPr>
+          <a:xfrm>
+            <a:off x="8310677" y="4526280"/>
+            <a:ext cx="3149498" cy="576072"/>
+          </a:xfrm>
+          <a:prstGeom prst="rect">
+            <a:avLst/>
+          </a:prstGeom>
+          <a:noFill/>
+          <a:ln/>
+        </p:spPr>
+        <p:txBody>
+          <a:bodyPr wrap="square" lIns="0" tIns="0" rIns="0" bIns="0" rtlCol="0" anchor="t"/>
+          <a:lstStyle/>
+          <a:p>
+            <a:pPr indent="0" marL="0">
+              <a:buNone/>
+            </a:pPr>
+            <a:r>
+              <a:rPr lang="en-US" sz="1600" b="1" dirty="0">
+                <a:solidFill>
+                  <a:schemeClr val="tx1"/>
+                </a:solidFill>
+                <a:latin typeface="Cambria" pitchFamily="34" charset="0"/>
+                <a:ea typeface="Cambria" pitchFamily="34" charset="-122"/>
+                <a:cs typeface="Cambria" pitchFamily="34" charset="-120"/>
+              </a:rPr>
+              <a:t>Judged on what data?</a:t>
+            </a:r>
+            <a:endParaRPr lang="en-US" sz="1600" dirty="0"/>
+          </a:p>
+        </p:txBody>
+      </p:sp>
+      <p:sp>
+        <p:nvSpPr>
+          <p:cNvPr id="28" name="Card text"/>
+          <p:cNvSpPr txBox="1"/>
+          <p:nvPr/>
+        </p:nvSpPr>
+        <p:spPr>
+          <a:xfrm>
+            <a:off x="8310677" y="5175504"/>
+            <a:ext cx="3149498" cy="868680"/>
+          </a:xfrm>
+          <a:prstGeom prst="rect">
+            <a:avLst/>
+          </a:prstGeom>
+          <a:noFill/>
+          <a:ln/>
+        </p:spPr>
+        <p:txBody>
+          <a:bodyPr wrap="square" lIns="0" tIns="0" rIns="0" bIns="0" rtlCol="0" anchor="t"/>
+          <a:lstStyle/>
+          <a:p>
+            <a:pPr indent="0" marL="0">
+              <a:buNone/>
+            </a:pPr>
+            <a:r>
+              <a:rPr lang="en-US" sz="1300" dirty="0">
+                <a:solidFill>
+                  <a:schemeClr val="tx2"/>
+                </a:solidFill>
+              </a:rPr>
+              <a:t>And what could our data reveal about individuals before we share it?</a:t>
+            </a:r>
+            <a:endParaRPr lang="en-US" sz="1300" dirty="0"/>
           </a:p>
         </p:txBody>
       </p:sp>
@@ -16226,7 +16299,7 @@
                   <a:schemeClr val="accent1"/>
                 </a:solidFill>
               </a:rPr>
-              <a:t>KEY TAKEAWAYS</a:t>
+              <a:t>AXIOM LAB 2.13 · MODULE AXIOM-13</a:t>
             </a:r>
             <a:endParaRPr lang="en-US" sz="1200" dirty="0"/>
           </a:p>
@@ -16267,22 +16340,105 @@
                 <a:ea typeface="Cambria" pitchFamily="34" charset="-122"/>
                 <a:cs typeface="Cambria" pitchFamily="34" charset="-120"/>
               </a:rPr>
-              <a:t>What to carry forward</a:t>
+              <a:t>Pricing a learned warning, in AXIOM</a:t>
             </a:r>
             <a:endParaRPr lang="en-US" sz="3200" dirty="0"/>
           </a:p>
         </p:txBody>
       </p:sp>
-      <p:sp>
-        <p:nvSpPr>
-          <p:cNvPr id="5" name="Number"/>
+      <p:pic>
+        <p:nvPicPr>
+          <p:cNvPr id="5" name="AXIOM logo" descr="AXIOM">    </p:cNvPr>
+          <p:cNvPicPr>
+            <a:picLocks noChangeAspect="1"/>
+          </p:cNvPicPr>
+          <p:nvPr/>
+        </p:nvPicPr>
+        <p:blipFill>
+          <a:blip r:embed="rId1"/>
+          <a:stretch>
+            <a:fillRect/>
+          </a:stretch>
+        </p:blipFill>
+        <p:spPr>
+          <a:xfrm>
+            <a:off x="9539935" y="310896"/>
+            <a:ext cx="2103120" cy="420624"/>
+          </a:xfrm>
+          <a:prstGeom prst="rect">
+            <a:avLst/>
+          </a:prstGeom>
+        </p:spPr>
+      </p:pic>
+      <p:sp>
+        <p:nvSpPr>
+          <p:cNvPr id="6" name="Situation"/>
+          <p:cNvSpPr txBox="1"/>
+          <p:nvPr/>
+        </p:nvSpPr>
+        <p:spPr>
+          <a:xfrm>
+            <a:off x="548640" y="1645920"/>
+            <a:ext cx="11094415" cy="777240"/>
+          </a:xfrm>
+          <a:prstGeom prst="rect">
+            <a:avLst/>
+          </a:prstGeom>
+          <a:noFill/>
+          <a:ln/>
+        </p:spPr>
+        <p:txBody>
+          <a:bodyPr wrap="square" lIns="0" tIns="0" rIns="0" bIns="0" rtlCol="0" anchor="t"/>
+          <a:lstStyle/>
+          <a:p>
+            <a:pPr indent="0" marL="0">
+              <a:buNone/>
+            </a:pPr>
+            <a:r>
+              <a:rPr lang="en-US" sz="1500" dirty="0">
+                <a:solidFill>
+                  <a:schemeClr val="tx1"/>
+                </a:solidFill>
+              </a:rPr>
+              <a:t>The audit committee will not pay for the desk's warning until it knows what the warning can be worth, at which threshold to read it, and whether its promise survives fresh data. Open AXIOM, choose Lab 2.13 and load the Meridian warning instance.</a:t>
+            </a:r>
+            <a:endParaRPr lang="en-US" sz="1500" dirty="0"/>
+          </a:p>
+        </p:txBody>
+      </p:sp>
+      <p:sp>
+        <p:nvSpPr>
+          <p:cNvPr id="7" name="Flow line"/>
           <p:cNvSpPr/>
           <p:nvPr/>
         </p:nvSpPr>
         <p:spPr>
           <a:xfrm>
-            <a:off x="548640" y="1737360"/>
-            <a:ext cx="566928" cy="566928"/>
+            <a:off x="1658082" y="2880360"/>
+            <a:ext cx="8875532" cy="0"/>
+          </a:xfrm>
+          <a:prstGeom prst="line">
+            <a:avLst/>
+          </a:prstGeom>
+          <a:noFill/>
+          <a:ln w="25400">
+            <a:solidFill>
+              <a:srgbClr val="C4CBD8"/>
+            </a:solidFill>
+            <a:prstDash val="solid"/>
+          </a:ln>
+        </p:spPr>
+      </p:sp>
+      <p:sp>
+        <p:nvSpPr>
+          <p:cNvPr id="8" name="Number"/>
+          <p:cNvSpPr/>
+          <p:nvPr/>
+        </p:nvSpPr>
+        <p:spPr>
+          <a:xfrm>
+            <a:off x="1383762" y="2606040"/>
+            <a:ext cx="548640" cy="548640"/>
           </a:xfrm>
           <a:prstGeom prst="ellipse">
             <a:avLst/>
@@ -16300,14 +16456,14 @@
       </p:sp>
       <p:sp>
         <p:nvSpPr>
-          <p:cNvPr id="6" name="Text 3"/>
+          <p:cNvPr id="9" name="Text 5"/>
           <p:cNvSpPr txBox="1"/>
           <p:nvPr/>
         </p:nvSpPr>
         <p:spPr>
           <a:xfrm>
-            <a:off x="548640" y="1737360"/>
-            <a:ext cx="566928" cy="566928"/>
+            <a:off x="1383762" y="2606040"/>
+            <a:ext cx="548640" cy="548640"/>
           </a:xfrm>
           <a:prstGeom prst="rect">
             <a:avLst/>
@@ -16323,7 +16479,7 @@
               <a:buNone/>
             </a:pPr>
             <a:r>
-              <a:rPr lang="en-US" sz="1500" b="1" dirty="0">
+              <a:rPr lang="en-US" sz="1600" b="1" dirty="0">
                 <a:solidFill>
                   <a:schemeClr val="bg1"/>
                 </a:solidFill>
@@ -16333,20 +16489,20 @@
               </a:rPr>
               <a:t>1</a:t>
             </a:r>
-            <a:endParaRPr lang="en-US" sz="1500" dirty="0"/>
-          </a:p>
-        </p:txBody>
-      </p:sp>
-      <p:sp>
-        <p:nvSpPr>
-          <p:cNvPr id="7" name="Row text"/>
+            <a:endParaRPr lang="en-US" sz="1600" dirty="0"/>
+          </a:p>
+        </p:txBody>
+      </p:sp>
+      <p:sp>
+        <p:nvSpPr>
+          <p:cNvPr id="10" name="Flow head"/>
           <p:cNvSpPr txBox="1"/>
           <p:nvPr/>
         </p:nvSpPr>
         <p:spPr>
           <a:xfrm>
-            <a:off x="1325880" y="1691640"/>
-            <a:ext cx="10317175" cy="841248"/>
+            <a:off x="621792" y="3291840"/>
+            <a:ext cx="2072579" cy="548640"/>
           </a:xfrm>
           <a:prstGeom prst="rect">
             <a:avLst/>
@@ -16355,34 +16511,73 @@
           <a:ln/>
         </p:spPr>
         <p:txBody>
-          <a:bodyPr wrap="square" lIns="0" tIns="0" rIns="0" bIns="0" rtlCol="0" anchor="ctr"/>
-          <a:lstStyle/>
-          <a:p>
-            <a:pPr indent="0" marL="0">
+          <a:bodyPr wrap="square" lIns="0" tIns="0" rIns="0" bIns="0" rtlCol="0" anchor="t"/>
+          <a:lstStyle/>
+          <a:p>
+            <a:pPr algn="ctr" indent="0" marL="0">
               <a:buNone/>
             </a:pPr>
             <a:r>
-              <a:rPr lang="en-US" sz="1500" dirty="0">
+              <a:rPr lang="en-US" sz="1600" b="1" dirty="0">
                 <a:solidFill>
                   <a:schemeClr val="tx1"/>
                 </a:solidFill>
-              </a:rPr>
-              <a:t>Learning supplies a declared part of the model, is judged on data it has not seen, and leaves the commitments to the optimizer; computed features never lower the floor, and leaked fields fake it.</a:t>
-            </a:r>
-            <a:endParaRPr lang="en-US" sz="1500" dirty="0"/>
-          </a:p>
-        </p:txBody>
-      </p:sp>
-      <p:sp>
-        <p:nvSpPr>
-          <p:cNvPr id="8" name="Number"/>
+                <a:latin typeface="Cambria" pitchFamily="34" charset="0"/>
+                <a:ea typeface="Cambria" pitchFamily="34" charset="-122"/>
+                <a:cs typeface="Cambria" pitchFamily="34" charset="-120"/>
+              </a:rPr>
+              <a:t>Read the record</a:t>
+            </a:r>
+            <a:endParaRPr lang="en-US" sz="1600" dirty="0"/>
+          </a:p>
+        </p:txBody>
+      </p:sp>
+      <p:sp>
+        <p:nvSpPr>
+          <p:cNvPr id="11" name="Flow text"/>
+          <p:cNvSpPr txBox="1"/>
+          <p:nvPr/>
+        </p:nvSpPr>
+        <p:spPr>
+          <a:xfrm>
+            <a:off x="640080" y="3867912"/>
+            <a:ext cx="2036003" cy="1554480"/>
+          </a:xfrm>
+          <a:prstGeom prst="rect">
+            <a:avLst/>
+          </a:prstGeom>
+          <a:noFill/>
+          <a:ln/>
+        </p:spPr>
+        <p:txBody>
+          <a:bodyPr wrap="square" lIns="0" tIns="0" rIns="0" bIns="0" rtlCol="0" anchor="t"/>
+          <a:lstStyle/>
+          <a:p>
+            <a:pPr algn="ctr" indent="0" marL="0">
+              <a:buNone/>
+            </a:pPr>
+            <a:r>
+              <a:rPr lang="en-US" sz="1400" dirty="0">
+                <a:solidFill>
+                  <a:schemeClr val="tx2"/>
+                </a:solidFill>
+              </a:rPr>
+              <a:t>Compare readings with and without a closure; compute the ceiling.</a:t>
+            </a:r>
+            <a:endParaRPr lang="en-US" sz="1400" dirty="0"/>
+          </a:p>
+        </p:txBody>
+      </p:sp>
+      <p:sp>
+        <p:nvSpPr>
+          <p:cNvPr id="12" name="Number"/>
           <p:cNvSpPr/>
           <p:nvPr/>
         </p:nvSpPr>
         <p:spPr>
           <a:xfrm>
-            <a:off x="548640" y="2633472"/>
-            <a:ext cx="566928" cy="566928"/>
+            <a:off x="3602645" y="2606040"/>
+            <a:ext cx="548640" cy="548640"/>
           </a:xfrm>
           <a:prstGeom prst="ellipse">
             <a:avLst/>
@@ -16400,14 +16595,14 @@
       </p:sp>
       <p:sp>
         <p:nvSpPr>
-          <p:cNvPr id="9" name="Text 6"/>
+          <p:cNvPr id="13" name="Text 9"/>
           <p:cNvSpPr txBox="1"/>
           <p:nvPr/>
         </p:nvSpPr>
         <p:spPr>
           <a:xfrm>
-            <a:off x="548640" y="2633472"/>
-            <a:ext cx="566928" cy="566928"/>
+            <a:off x="3602645" y="2606040"/>
+            <a:ext cx="548640" cy="548640"/>
           </a:xfrm>
           <a:prstGeom prst="rect">
             <a:avLst/>
@@ -16423,7 +16618,7 @@
               <a:buNone/>
             </a:pPr>
             <a:r>
-              <a:rPr lang="en-US" sz="1500" b="1" dirty="0">
+              <a:rPr lang="en-US" sz="1600" b="1" dirty="0">
                 <a:solidFill>
                   <a:schemeClr val="bg1"/>
                 </a:solidFill>
@@ -16433,20 +16628,20 @@
               </a:rPr>
               <a:t>2</a:t>
             </a:r>
-            <a:endParaRPr lang="en-US" sz="1500" dirty="0"/>
-          </a:p>
-        </p:txBody>
-      </p:sp>
-      <p:sp>
-        <p:nvSpPr>
-          <p:cNvPr id="10" name="Row text"/>
+            <a:endParaRPr lang="en-US" sz="1600" dirty="0"/>
+          </a:p>
+        </p:txBody>
+      </p:sp>
+      <p:sp>
+        <p:nvSpPr>
+          <p:cNvPr id="14" name="Flow head"/>
           <p:cNvSpPr txBox="1"/>
           <p:nvPr/>
         </p:nvSpPr>
         <p:spPr>
           <a:xfrm>
-            <a:off x="1325880" y="2587752"/>
-            <a:ext cx="10317175" cy="841248"/>
+            <a:off x="2840675" y="3291840"/>
+            <a:ext cx="2072579" cy="548640"/>
           </a:xfrm>
           <a:prstGeom prst="rect">
             <a:avLst/>
@@ -16455,34 +16650,73 @@
           <a:ln/>
         </p:spPr>
         <p:txBody>
-          <a:bodyPr wrap="square" lIns="0" tIns="0" rIns="0" bIns="0" rtlCol="0" anchor="ctr"/>
-          <a:lstStyle/>
-          <a:p>
-            <a:pPr indent="0" marL="0">
+          <a:bodyPr wrap="square" lIns="0" tIns="0" rIns="0" bIns="0" rtlCol="0" anchor="t"/>
+          <a:lstStyle/>
+          <a:p>
+            <a:pPr algn="ctr" indent="0" marL="0">
               <a:buNone/>
             </a:pPr>
             <a:r>
-              <a:rPr lang="en-US" sz="1500" dirty="0">
+              <a:rPr lang="en-US" sz="1600" b="1" dirty="0">
                 <a:solidFill>
                   <a:schemeClr val="tx1"/>
                 </a:solidFill>
-              </a:rPr>
-              <a:t>Learning from a record is sample average approximation over predictors: a rich class can fit any record, so its record score is not evidence.</a:t>
-            </a:r>
-            <a:endParaRPr lang="en-US" sz="1500" dirty="0"/>
-          </a:p>
-        </p:txBody>
-      </p:sp>
-      <p:sp>
-        <p:nvSpPr>
-          <p:cNvPr id="11" name="Number"/>
+                <a:latin typeface="Cambria" pitchFamily="34" charset="0"/>
+                <a:ea typeface="Cambria" pitchFamily="34" charset="-122"/>
+                <a:cs typeface="Cambria" pitchFamily="34" charset="-120"/>
+              </a:rPr>
+              <a:t>Train and validate</a:t>
+            </a:r>
+            <a:endParaRPr lang="en-US" sz="1600" dirty="0"/>
+          </a:p>
+        </p:txBody>
+      </p:sp>
+      <p:sp>
+        <p:nvSpPr>
+          <p:cNvPr id="15" name="Flow text"/>
+          <p:cNvSpPr txBox="1"/>
+          <p:nvPr/>
+        </p:nvSpPr>
+        <p:spPr>
+          <a:xfrm>
+            <a:off x="2858963" y="3867912"/>
+            <a:ext cx="2036003" cy="1554480"/>
+          </a:xfrm>
+          <a:prstGeom prst="rect">
+            <a:avLst/>
+          </a:prstGeom>
+          <a:noFill/>
+          <a:ln/>
+        </p:spPr>
+        <p:txBody>
+          <a:bodyPr wrap="square" lIns="0" tIns="0" rIns="0" bIns="0" rtlCol="0" anchor="t"/>
+          <a:lstStyle/>
+          <a:p>
+            <a:pPr algn="ctr" indent="0" marL="0">
+              <a:buNone/>
+            </a:pPr>
+            <a:r>
+              <a:rPr lang="en-US" sz="1400" dirty="0">
+                <a:solidFill>
+                  <a:schemeClr val="tx2"/>
+                </a:solidFill>
+              </a:rPr>
+              <a:t>Fit a logistic and a boosted model; score them on the record, held-out folds and fresh programs.</a:t>
+            </a:r>
+            <a:endParaRPr lang="en-US" sz="1400" dirty="0"/>
+          </a:p>
+        </p:txBody>
+      </p:sp>
+      <p:sp>
+        <p:nvSpPr>
+          <p:cNvPr id="16" name="Number"/>
           <p:cNvSpPr/>
           <p:nvPr/>
         </p:nvSpPr>
         <p:spPr>
           <a:xfrm>
-            <a:off x="548640" y="3529584"/>
-            <a:ext cx="566928" cy="566928"/>
+            <a:off x="5821528" y="2606040"/>
+            <a:ext cx="548640" cy="548640"/>
           </a:xfrm>
           <a:prstGeom prst="ellipse">
             <a:avLst/>
@@ -16500,14 +16734,14 @@
       </p:sp>
       <p:sp>
         <p:nvSpPr>
-          <p:cNvPr id="12" name="Text 9"/>
+          <p:cNvPr id="17" name="Text 13"/>
           <p:cNvSpPr txBox="1"/>
           <p:nvPr/>
         </p:nvSpPr>
         <p:spPr>
           <a:xfrm>
-            <a:off x="548640" y="3529584"/>
-            <a:ext cx="566928" cy="566928"/>
+            <a:off x="5821528" y="2606040"/>
+            <a:ext cx="548640" cy="548640"/>
           </a:xfrm>
           <a:prstGeom prst="rect">
             <a:avLst/>
@@ -16523,7 +16757,7 @@
               <a:buNone/>
             </a:pPr>
             <a:r>
-              <a:rPr lang="en-US" sz="1500" b="1" dirty="0">
+              <a:rPr lang="en-US" sz="1600" b="1" dirty="0">
                 <a:solidFill>
                   <a:schemeClr val="bg1"/>
                 </a:solidFill>
@@ -16533,20 +16767,20 @@
               </a:rPr>
               <a:t>3</a:t>
             </a:r>
-            <a:endParaRPr lang="en-US" sz="1500" dirty="0"/>
-          </a:p>
-        </p:txBody>
-      </p:sp>
-      <p:sp>
-        <p:nvSpPr>
-          <p:cNvPr id="13" name="Row text"/>
+            <a:endParaRPr lang="en-US" sz="1600" dirty="0"/>
+          </a:p>
+        </p:txBody>
+      </p:sp>
+      <p:sp>
+        <p:nvSpPr>
+          <p:cNvPr id="18" name="Flow head"/>
           <p:cNvSpPr txBox="1"/>
           <p:nvPr/>
         </p:nvSpPr>
         <p:spPr>
           <a:xfrm>
-            <a:off x="1325880" y="3483864"/>
-            <a:ext cx="10317175" cy="841248"/>
+            <a:off x="5059558" y="3291840"/>
+            <a:ext cx="2072579" cy="548640"/>
           </a:xfrm>
           <a:prstGeom prst="rect">
             <a:avLst/>
@@ -16555,34 +16789,73 @@
           <a:ln/>
         </p:spPr>
         <p:txBody>
-          <a:bodyPr wrap="square" lIns="0" tIns="0" rIns="0" bIns="0" rtlCol="0" anchor="ctr"/>
-          <a:lstStyle/>
-          <a:p>
-            <a:pPr indent="0" marL="0">
+          <a:bodyPr wrap="square" lIns="0" tIns="0" rIns="0" bIns="0" rtlCol="0" anchor="t"/>
+          <a:lstStyle/>
+          <a:p>
+            <a:pPr algn="ctr" indent="0" marL="0">
               <a:buNone/>
             </a:pPr>
             <a:r>
-              <a:rPr lang="en-US" sz="1500" dirty="0">
+              <a:rPr lang="en-US" sz="1600" b="1" dirty="0">
                 <a:solidFill>
                   <a:schemeClr val="tx1"/>
                 </a:solidFill>
-              </a:rPr>
-              <a:t>A prediction is worth the decisions it changes. Its threshold comes from the decision's costs, and its value is capped by the information in its inputs.</a:t>
-            </a:r>
-            <a:endParaRPr lang="en-US" sz="1500" dirty="0"/>
-          </a:p>
-        </p:txBody>
-      </p:sp>
-      <p:sp>
-        <p:nvSpPr>
-          <p:cNvPr id="14" name="Number"/>
+                <a:latin typeface="Cambria" pitchFamily="34" charset="0"/>
+                <a:ea typeface="Cambria" pitchFamily="34" charset="-122"/>
+                <a:cs typeface="Cambria" pitchFamily="34" charset="-120"/>
+              </a:rPr>
+              <a:t>Price the warning</a:t>
+            </a:r>
+            <a:endParaRPr lang="en-US" sz="1600" dirty="0"/>
+          </a:p>
+        </p:txBody>
+      </p:sp>
+      <p:sp>
+        <p:nvSpPr>
+          <p:cNvPr id="19" name="Flow text"/>
+          <p:cNvSpPr txBox="1"/>
+          <p:nvPr/>
+        </p:nvSpPr>
+        <p:spPr>
+          <a:xfrm>
+            <a:off x="5077846" y="3867912"/>
+            <a:ext cx="2036003" cy="1554480"/>
+          </a:xfrm>
+          <a:prstGeom prst="rect">
+            <a:avLst/>
+          </a:prstGeom>
+          <a:noFill/>
+          <a:ln/>
+        </p:spPr>
+        <p:txBody>
+          <a:bodyPr wrap="square" lIns="0" tIns="0" rIns="0" bIns="0" rtlCol="0" anchor="t"/>
+          <a:lstStyle/>
+          <a:p>
+            <a:pPr algn="ctr" indent="0" marL="0">
+              <a:buNone/>
+            </a:pPr>
+            <a:r>
+              <a:rPr lang="en-US" sz="1400" dirty="0">
+                <a:solidFill>
+                  <a:schemeClr val="tx2"/>
+                </a:solidFill>
+              </a:rPr>
+              <a:t>Sweep the threshold; mark best accuracy and best value.</a:t>
+            </a:r>
+            <a:endParaRPr lang="en-US" sz="1400" dirty="0"/>
+          </a:p>
+        </p:txBody>
+      </p:sp>
+      <p:sp>
+        <p:nvSpPr>
+          <p:cNvPr id="20" name="Number"/>
           <p:cNvSpPr/>
           <p:nvPr/>
         </p:nvSpPr>
         <p:spPr>
           <a:xfrm>
-            <a:off x="548640" y="4425696"/>
-            <a:ext cx="566928" cy="566928"/>
+            <a:off x="8040411" y="2606040"/>
+            <a:ext cx="548640" cy="548640"/>
           </a:xfrm>
           <a:prstGeom prst="ellipse">
             <a:avLst/>
@@ -16600,14 +16873,14 @@
       </p:sp>
       <p:sp>
         <p:nvSpPr>
-          <p:cNvPr id="15" name="Text 12"/>
+          <p:cNvPr id="21" name="Text 17"/>
           <p:cNvSpPr txBox="1"/>
           <p:nvPr/>
         </p:nvSpPr>
         <p:spPr>
           <a:xfrm>
-            <a:off x="548640" y="4425696"/>
-            <a:ext cx="566928" cy="566928"/>
+            <a:off x="8040411" y="2606040"/>
+            <a:ext cx="548640" cy="548640"/>
           </a:xfrm>
           <a:prstGeom prst="rect">
             <a:avLst/>
@@ -16623,7 +16896,7 @@
               <a:buNone/>
             </a:pPr>
             <a:r>
-              <a:rPr lang="en-US" sz="1500" b="1" dirty="0">
+              <a:rPr lang="en-US" sz="1600" b="1" dirty="0">
                 <a:solidFill>
                   <a:schemeClr val="bg1"/>
                 </a:solidFill>
@@ -16633,20 +16906,20 @@
               </a:rPr>
               <a:t>4</a:t>
             </a:r>
-            <a:endParaRPr lang="en-US" sz="1500" dirty="0"/>
-          </a:p>
-        </p:txBody>
-      </p:sp>
-      <p:sp>
-        <p:nvSpPr>
-          <p:cNvPr id="16" name="Row text"/>
+            <a:endParaRPr lang="en-US" sz="1600" dirty="0"/>
+          </a:p>
+        </p:txBody>
+      </p:sp>
+      <p:sp>
+        <p:nvSpPr>
+          <p:cNvPr id="22" name="Flow head"/>
           <p:cNvSpPr txBox="1"/>
           <p:nvPr/>
         </p:nvSpPr>
         <p:spPr>
           <a:xfrm>
-            <a:off x="1325880" y="4379976"/>
-            <a:ext cx="10317175" cy="841248"/>
+            <a:off x="7278441" y="3291840"/>
+            <a:ext cx="2072579" cy="548640"/>
           </a:xfrm>
           <a:prstGeom prst="rect">
             <a:avLst/>
@@ -16655,34 +16928,73 @@
           <a:ln/>
         </p:spPr>
         <p:txBody>
-          <a:bodyPr wrap="square" lIns="0" tIns="0" rIns="0" bIns="0" rtlCol="0" anchor="ctr"/>
-          <a:lstStyle/>
-          <a:p>
-            <a:pPr indent="0" marL="0">
+          <a:bodyPr wrap="square" lIns="0" tIns="0" rIns="0" bIns="0" rtlCol="0" anchor="t"/>
+          <a:lstStyle/>
+          <a:p>
+            <a:pPr algn="ctr" indent="0" marL="0">
               <a:buNone/>
             </a:pPr>
             <a:r>
-              <a:rPr lang="en-US" sz="1500" dirty="0">
+              <a:rPr lang="en-US" sz="1600" b="1" dirty="0">
                 <a:solidFill>
                   <a:schemeClr val="tx1"/>
                 </a:solidFill>
-              </a:rPr>
-              <a:t>Fresh data, confidence bounds, and conformal sets give guarantees while the future resembles the record; certify designs on bounds, not point estimates.</a:t>
-            </a:r>
-            <a:endParaRPr lang="en-US" sz="1500" dirty="0"/>
-          </a:p>
-        </p:txBody>
-      </p:sp>
-      <p:sp>
-        <p:nvSpPr>
-          <p:cNvPr id="17" name="Number"/>
+                <a:latin typeface="Cambria" pitchFamily="34" charset="0"/>
+                <a:ea typeface="Cambria" pitchFamily="34" charset="-122"/>
+                <a:cs typeface="Cambria" pitchFamily="34" charset="-120"/>
+              </a:rPr>
+              <a:t>Check and certify</a:t>
+            </a:r>
+            <a:endParaRPr lang="en-US" sz="1600" dirty="0"/>
+          </a:p>
+        </p:txBody>
+      </p:sp>
+      <p:sp>
+        <p:nvSpPr>
+          <p:cNvPr id="23" name="Flow text"/>
+          <p:cNvSpPr txBox="1"/>
+          <p:nvPr/>
+        </p:nvSpPr>
+        <p:spPr>
+          <a:xfrm>
+            <a:off x="7296729" y="3867912"/>
+            <a:ext cx="2036003" cy="1554480"/>
+          </a:xfrm>
+          <a:prstGeom prst="rect">
+            <a:avLst/>
+          </a:prstGeom>
+          <a:noFill/>
+          <a:ln/>
+        </p:spPr>
+        <p:txBody>
+          <a:bodyPr wrap="square" lIns="0" tIns="0" rIns="0" bIns="0" rtlCol="0" anchor="t"/>
+          <a:lstStyle/>
+          <a:p>
+            <a:pPr algn="ctr" indent="0" marL="0">
+              <a:buNone/>
+            </a:pPr>
+            <a:r>
+              <a:rPr lang="en-US" sz="1400" dirty="0">
+                <a:solidFill>
+                  <a:schemeClr val="tx2"/>
+                </a:solidFill>
+              </a:rPr>
+              <a:t>Trusted, held-out and certified designs on fresh paths; repeat on 200 records.</a:t>
+            </a:r>
+            <a:endParaRPr lang="en-US" sz="1400" dirty="0"/>
+          </a:p>
+        </p:txBody>
+      </p:sp>
+      <p:sp>
+        <p:nvSpPr>
+          <p:cNvPr id="24" name="Number"/>
           <p:cNvSpPr/>
           <p:nvPr/>
         </p:nvSpPr>
         <p:spPr>
           <a:xfrm>
-            <a:off x="548640" y="5321808"/>
-            <a:ext cx="566928" cy="566928"/>
+            <a:off x="10259294" y="2606040"/>
+            <a:ext cx="548640" cy="548640"/>
           </a:xfrm>
           <a:prstGeom prst="ellipse">
             <a:avLst/>
@@ -16700,14 +17012,14 @@
       </p:sp>
       <p:sp>
         <p:nvSpPr>
-          <p:cNvPr id="18" name="Text 15"/>
+          <p:cNvPr id="25" name="Text 21"/>
           <p:cNvSpPr txBox="1"/>
           <p:nvPr/>
         </p:nvSpPr>
         <p:spPr>
           <a:xfrm>
-            <a:off x="548640" y="5321808"/>
-            <a:ext cx="566928" cy="566928"/>
+            <a:off x="10259294" y="2606040"/>
+            <a:ext cx="548640" cy="548640"/>
           </a:xfrm>
           <a:prstGeom prst="rect">
             <a:avLst/>
@@ -16723,7 +17035,7 @@
               <a:buNone/>
             </a:pPr>
             <a:r>
-              <a:rPr lang="en-US" sz="1500" b="1" dirty="0">
+              <a:rPr lang="en-US" sz="1600" b="1" dirty="0">
                 <a:solidFill>
                   <a:schemeClr val="bg1"/>
                 </a:solidFill>
@@ -16733,20 +17045,20 @@
               </a:rPr>
               <a:t>5</a:t>
             </a:r>
-            <a:endParaRPr lang="en-US" sz="1500" dirty="0"/>
-          </a:p>
-        </p:txBody>
-      </p:sp>
-      <p:sp>
-        <p:nvSpPr>
-          <p:cNvPr id="19" name="Row text"/>
+            <a:endParaRPr lang="en-US" sz="1600" dirty="0"/>
+          </a:p>
+        </p:txBody>
+      </p:sp>
+      <p:sp>
+        <p:nvSpPr>
+          <p:cNvPr id="26" name="Flow head"/>
           <p:cNvSpPr txBox="1"/>
           <p:nvPr/>
         </p:nvSpPr>
         <p:spPr>
           <a:xfrm>
-            <a:off x="1325880" y="5276088"/>
-            <a:ext cx="10317175" cy="841248"/>
+            <a:off x="9497324" y="3291840"/>
+            <a:ext cx="2072579" cy="548640"/>
           </a:xfrm>
           <a:prstGeom prst="rect">
             <a:avLst/>
@@ -16755,6 +17067,108 @@
           <a:ln/>
         </p:spPr>
         <p:txBody>
+          <a:bodyPr wrap="square" lIns="0" tIns="0" rIns="0" bIns="0" rtlCol="0" anchor="t"/>
+          <a:lstStyle/>
+          <a:p>
+            <a:pPr algn="ctr" indent="0" marL="0">
+              <a:buNone/>
+            </a:pPr>
+            <a:r>
+              <a:rPr lang="en-US" sz="1600" b="1" dirty="0">
+                <a:solidFill>
+                  <a:schemeClr val="tx1"/>
+                </a:solidFill>
+                <a:latin typeface="Cambria" pitchFamily="34" charset="0"/>
+                <a:ea typeface="Cambria" pitchFamily="34" charset="-122"/>
+                <a:cs typeface="Cambria" pitchFamily="34" charset="-120"/>
+              </a:rPr>
+              <a:t>Compress and explain</a:t>
+            </a:r>
+            <a:endParaRPr lang="en-US" sz="1600" dirty="0"/>
+          </a:p>
+        </p:txBody>
+      </p:sp>
+      <p:sp>
+        <p:nvSpPr>
+          <p:cNvPr id="27" name="Flow text"/>
+          <p:cNvSpPr txBox="1"/>
+          <p:nvPr/>
+        </p:nvSpPr>
+        <p:spPr>
+          <a:xfrm>
+            <a:off x="9515612" y="3867912"/>
+            <a:ext cx="2036003" cy="1554480"/>
+          </a:xfrm>
+          <a:prstGeom prst="rect">
+            <a:avLst/>
+          </a:prstGeom>
+          <a:noFill/>
+          <a:ln/>
+        </p:spPr>
+        <p:txBody>
+          <a:bodyPr wrap="square" lIns="0" tIns="0" rIns="0" bIns="0" rtlCol="0" anchor="t"/>
+          <a:lstStyle/>
+          <a:p>
+            <a:pPr algn="ctr" indent="0" marL="0">
+              <a:buNone/>
+            </a:pPr>
+            <a:r>
+              <a:rPr lang="en-US" sz="1400" dirty="0">
+                <a:solidFill>
+                  <a:schemeClr val="tx2"/>
+                </a:solidFill>
+              </a:rPr>
+              <a:t>Price one index and subsets; compare two games of attribution.</a:t>
+            </a:r>
+            <a:endParaRPr lang="en-US" sz="1400" dirty="0"/>
+          </a:p>
+        </p:txBody>
+      </p:sp>
+      <p:sp>
+        <p:nvSpPr>
+          <p:cNvPr id="28" name="Deliverable card"/>
+          <p:cNvSpPr/>
+          <p:nvPr/>
+        </p:nvSpPr>
+        <p:spPr>
+          <a:xfrm>
+            <a:off x="548640" y="5486400"/>
+            <a:ext cx="11094415" cy="685800"/>
+          </a:xfrm>
+          <a:prstGeom prst="roundRect">
+            <a:avLst>
+              <a:gd name="adj" fmla="val 10667"/>
+            </a:avLst>
+          </a:prstGeom>
+          <a:solidFill>
+            <a:schemeClr val="bg2"/>
+          </a:solidFill>
+          <a:ln w="9525">
+            <a:solidFill>
+              <a:srgbClr val="C4CBD8"/>
+            </a:solidFill>
+            <a:prstDash val="solid"/>
+          </a:ln>
+        </p:spPr>
+      </p:sp>
+      <p:sp>
+        <p:nvSpPr>
+          <p:cNvPr id="29" name="Deliverable"/>
+          <p:cNvSpPr txBox="1"/>
+          <p:nvPr/>
+        </p:nvSpPr>
+        <p:spPr>
+          <a:xfrm>
+            <a:off x="777240" y="5559552"/>
+            <a:ext cx="10637215" cy="539496"/>
+          </a:xfrm>
+          <a:prstGeom prst="rect">
+            <a:avLst/>
+          </a:prstGeom>
+          <a:noFill/>
+          <a:ln/>
+        </p:spPr>
+        <p:txBody>
           <a:bodyPr wrap="square" lIns="0" tIns="0" rIns="0" bIns="0" rtlCol="0" anchor="ctr"/>
           <a:lstStyle/>
           <a:p>
@@ -16762,14 +17176,22 @@
               <a:buNone/>
             </a:pPr>
             <a:r>
-              <a:rPr lang="en-US" sz="1500" dirty="0">
+              <a:rPr lang="en-US" sz="1400" b="1" dirty="0">
                 <a:solidFill>
                   <a:schemeClr val="tx1"/>
                 </a:solidFill>
               </a:rPr>
-              <a:t>Principal components keep variance, not relevance, and attributions describe a model under a declared game. The desk's warning is worth at most $1.44 million and, certified, about $1 million.</a:t>
-            </a:r>
-            <a:endParaRPr lang="en-US" sz="1500" dirty="0"/>
+              <a:t>Deliverable:</a:t>
+            </a:r>
+            <a:r>
+              <a:rPr lang="en-US" sz="1400" dirty="0">
+                <a:solidFill>
+                  <a:schemeClr val="tx1"/>
+                </a:solidFill>
+              </a:rPr>
+              <a:t> a one-page note to the board: what the warning can be worth, the threshold and packages it should use, its certified value and fresh check, and what the desk should record next. About 75 minutes.</a:t>
+            </a:r>
+            <a:endParaRPr lang="en-US" sz="1400" dirty="0"/>
           </a:p>
         </p:txBody>
       </p:sp>
@@ -16875,7 +17297,7 @@
                   <a:schemeClr val="accent1"/>
                 </a:solidFill>
               </a:rPr>
-              <a:t>THIS WEEK'S LABORATORY</a:t>
+              <a:t>KEY TAKEAWAYS</a:t>
             </a:r>
             <a:endParaRPr lang="en-US" sz="1200" dirty="0"/>
           </a:p>
@@ -16916,7 +17338,7 @@
                 <a:ea typeface="Cambria" pitchFamily="34" charset="-122"/>
                 <a:cs typeface="Cambria" pitchFamily="34" charset="-120"/>
               </a:rPr>
-              <a:t>Notebook and workbook reproduce the book</a:t>
+              <a:t>What to carry forward</a:t>
             </a:r>
             <a:endParaRPr lang="en-US" sz="3200" dirty="0"/>
           </a:p>
@@ -16924,26 +17346,24 @@
       </p:sp>
       <p:sp>
         <p:nvSpPr>
-          <p:cNvPr id="5" name="Stat card"/>
+          <p:cNvPr id="5" name="Number"/>
           <p:cNvSpPr/>
           <p:nvPr/>
         </p:nvSpPr>
         <p:spPr>
           <a:xfrm>
-            <a:off x="548640" y="1691640"/>
-            <a:ext cx="2567864" cy="1691640"/>
-          </a:xfrm>
-          <a:prstGeom prst="roundRect">
-            <a:avLst>
-              <a:gd name="adj" fmla="val 4324"/>
-            </a:avLst>
+            <a:off x="548640" y="1737360"/>
+            <a:ext cx="566928" cy="566928"/>
+          </a:xfrm>
+          <a:prstGeom prst="ellipse">
+            <a:avLst/>
           </a:prstGeom>
           <a:solidFill>
-            <a:schemeClr val="tx1"/>
+            <a:schemeClr val="accent1"/>
           </a:solidFill>
-          <a:ln w="9525">
+          <a:ln w="6350">
             <a:solidFill>
-              <a:srgbClr val="0F1E3D"/>
+              <a:schemeClr val="accent1"/>
             </a:solidFill>
             <a:prstDash val="solid"/>
           </a:ln>
@@ -16951,14 +17371,14 @@
       </p:sp>
       <p:sp>
         <p:nvSpPr>
-          <p:cNvPr id="6" name="Stat value"/>
+          <p:cNvPr id="6" name="Text 3"/>
           <p:cNvSpPr txBox="1"/>
           <p:nvPr/>
         </p:nvSpPr>
         <p:spPr>
           <a:xfrm>
-            <a:off x="685800" y="1801368"/>
-            <a:ext cx="2293544" cy="914400"/>
+            <a:off x="548640" y="1737360"/>
+            <a:ext cx="566928" cy="566928"/>
           </a:xfrm>
           <a:prstGeom prst="rect">
             <a:avLst/>
@@ -16974,30 +17394,30 @@
               <a:buNone/>
             </a:pPr>
             <a:r>
-              <a:rPr lang="en-US" sz="4400" b="1" dirty="0">
-                <a:solidFill>
-                  <a:schemeClr val="accent1"/>
-                </a:solidFill>
-                <a:latin typeface="Cambria" pitchFamily="34" charset="0"/>
-                <a:ea typeface="Cambria" pitchFamily="34" charset="-122"/>
-                <a:cs typeface="Cambria" pitchFamily="34" charset="-120"/>
-              </a:rPr>
-              <a:t>376</a:t>
-            </a:r>
-            <a:endParaRPr lang="en-US" sz="4400" dirty="0"/>
-          </a:p>
-        </p:txBody>
-      </p:sp>
-      <p:sp>
-        <p:nvSpPr>
-          <p:cNvPr id="7" name="Stat label"/>
+              <a:rPr lang="en-US" sz="1500" b="1" dirty="0">
+                <a:solidFill>
+                  <a:schemeClr val="bg1"/>
+                </a:solidFill>
+                <a:latin typeface="Calibri" pitchFamily="34" charset="0"/>
+                <a:ea typeface="Calibri" pitchFamily="34" charset="-122"/>
+                <a:cs typeface="Calibri" pitchFamily="34" charset="-120"/>
+              </a:rPr>
+              <a:t>1</a:t>
+            </a:r>
+            <a:endParaRPr lang="en-US" sz="1500" dirty="0"/>
+          </a:p>
+        </p:txBody>
+      </p:sp>
+      <p:sp>
+        <p:nvSpPr>
+          <p:cNvPr id="7" name="Row text"/>
           <p:cNvSpPr txBox="1"/>
           <p:nvPr/>
         </p:nvSpPr>
         <p:spPr>
           <a:xfrm>
-            <a:off x="685800" y="2697480"/>
-            <a:ext cx="2293544" cy="612648"/>
+            <a:off x="1325880" y="1691640"/>
+            <a:ext cx="10317175" cy="841248"/>
           </a:xfrm>
           <a:prstGeom prst="rect">
             <a:avLst/>
@@ -17006,46 +17426,44 @@
           <a:ln/>
         </p:spPr>
         <p:txBody>
-          <a:bodyPr wrap="square" lIns="0" tIns="0" rIns="0" bIns="0" rtlCol="0" anchor="t"/>
-          <a:lstStyle/>
-          <a:p>
-            <a:pPr algn="ctr" indent="0" marL="0">
+          <a:bodyPr wrap="square" lIns="0" tIns="0" rIns="0" bIns="0" rtlCol="0" anchor="ctr"/>
+          <a:lstStyle/>
+          <a:p>
+            <a:pPr indent="0" marL="0">
               <a:buNone/>
             </a:pPr>
             <a:r>
-              <a:rPr lang="en-US" sz="1400" dirty="0">
-                <a:solidFill>
-                  <a:schemeClr val="bg2"/>
-                </a:solidFill>
-              </a:rPr>
-              <a:t>notebook checkpoints, every one PASS</a:t>
-            </a:r>
-            <a:endParaRPr lang="en-US" sz="1400" dirty="0"/>
-          </a:p>
-        </p:txBody>
-      </p:sp>
-      <p:sp>
-        <p:nvSpPr>
-          <p:cNvPr id="8" name="Stat card"/>
+              <a:rPr lang="en-US" sz="1500" dirty="0">
+                <a:solidFill>
+                  <a:schemeClr val="tx1"/>
+                </a:solidFill>
+              </a:rPr>
+              <a:t>Learning supplies a declared part of the model, is judged on data it has not seen, and leaves the commitments to the optimizer; computed features never lower the floor, and leaked fields fake it.</a:t>
+            </a:r>
+            <a:endParaRPr lang="en-US" sz="1500" dirty="0"/>
+          </a:p>
+        </p:txBody>
+      </p:sp>
+      <p:sp>
+        <p:nvSpPr>
+          <p:cNvPr id="8" name="Number"/>
           <p:cNvSpPr/>
           <p:nvPr/>
         </p:nvSpPr>
         <p:spPr>
           <a:xfrm>
-            <a:off x="3390824" y="1691640"/>
-            <a:ext cx="2567864" cy="1691640"/>
-          </a:xfrm>
-          <a:prstGeom prst="roundRect">
-            <a:avLst>
-              <a:gd name="adj" fmla="val 4324"/>
-            </a:avLst>
+            <a:off x="548640" y="2633472"/>
+            <a:ext cx="566928" cy="566928"/>
+          </a:xfrm>
+          <a:prstGeom prst="ellipse">
+            <a:avLst/>
           </a:prstGeom>
           <a:solidFill>
-            <a:schemeClr val="bg2"/>
+            <a:schemeClr val="accent1"/>
           </a:solidFill>
-          <a:ln w="9525">
+          <a:ln w="6350">
             <a:solidFill>
-              <a:srgbClr val="C4CBD8"/>
+              <a:schemeClr val="accent1"/>
             </a:solidFill>
             <a:prstDash val="solid"/>
           </a:ln>
@@ -17053,14 +17471,14 @@
       </p:sp>
       <p:sp>
         <p:nvSpPr>
-          <p:cNvPr id="9" name="Stat value"/>
+          <p:cNvPr id="9" name="Text 6"/>
           <p:cNvSpPr txBox="1"/>
           <p:nvPr/>
         </p:nvSpPr>
         <p:spPr>
           <a:xfrm>
-            <a:off x="3527984" y="1801368"/>
-            <a:ext cx="2293544" cy="914400"/>
+            <a:off x="548640" y="2633472"/>
+            <a:ext cx="566928" cy="566928"/>
           </a:xfrm>
           <a:prstGeom prst="rect">
             <a:avLst/>
@@ -17076,30 +17494,30 @@
               <a:buNone/>
             </a:pPr>
             <a:r>
-              <a:rPr lang="en-US" sz="4400" b="1" dirty="0">
-                <a:solidFill>
-                  <a:schemeClr val="tx1"/>
-                </a:solidFill>
-                <a:latin typeface="Cambria" pitchFamily="34" charset="0"/>
-                <a:ea typeface="Cambria" pitchFamily="34" charset="-122"/>
-                <a:cs typeface="Cambria" pitchFamily="34" charset="-120"/>
-              </a:rPr>
-              <a:t>203</a:t>
-            </a:r>
-            <a:endParaRPr lang="en-US" sz="4400" dirty="0"/>
-          </a:p>
-        </p:txBody>
-      </p:sp>
-      <p:sp>
-        <p:nvSpPr>
-          <p:cNvPr id="10" name="Stat label"/>
+              <a:rPr lang="en-US" sz="1500" b="1" dirty="0">
+                <a:solidFill>
+                  <a:schemeClr val="bg1"/>
+                </a:solidFill>
+                <a:latin typeface="Calibri" pitchFamily="34" charset="0"/>
+                <a:ea typeface="Calibri" pitchFamily="34" charset="-122"/>
+                <a:cs typeface="Calibri" pitchFamily="34" charset="-120"/>
+              </a:rPr>
+              <a:t>2</a:t>
+            </a:r>
+            <a:endParaRPr lang="en-US" sz="1500" dirty="0"/>
+          </a:p>
+        </p:txBody>
+      </p:sp>
+      <p:sp>
+        <p:nvSpPr>
+          <p:cNvPr id="10" name="Row text"/>
           <p:cNvSpPr txBox="1"/>
           <p:nvPr/>
         </p:nvSpPr>
         <p:spPr>
           <a:xfrm>
-            <a:off x="3527984" y="2697480"/>
-            <a:ext cx="2293544" cy="612648"/>
+            <a:off x="1325880" y="2587752"/>
+            <a:ext cx="10317175" cy="841248"/>
           </a:xfrm>
           <a:prstGeom prst="rect">
             <a:avLst/>
@@ -17108,46 +17526,44 @@
           <a:ln/>
         </p:spPr>
         <p:txBody>
-          <a:bodyPr wrap="square" lIns="0" tIns="0" rIns="0" bIns="0" rtlCol="0" anchor="t"/>
-          <a:lstStyle/>
-          <a:p>
-            <a:pPr algn="ctr" indent="0" marL="0">
+          <a:bodyPr wrap="square" lIns="0" tIns="0" rIns="0" bIns="0" rtlCol="0" anchor="ctr"/>
+          <a:lstStyle/>
+          <a:p>
+            <a:pPr indent="0" marL="0">
               <a:buNone/>
             </a:pPr>
             <a:r>
-              <a:rPr lang="en-US" sz="1400" dirty="0">
-                <a:solidFill>
-                  <a:schemeClr val="tx2"/>
-                </a:solidFill>
-              </a:rPr>
-              <a:t>workbook checks against the engine, ALL PASS</a:t>
-            </a:r>
-            <a:endParaRPr lang="en-US" sz="1400" dirty="0"/>
-          </a:p>
-        </p:txBody>
-      </p:sp>
-      <p:sp>
-        <p:nvSpPr>
-          <p:cNvPr id="11" name="Stat card"/>
+              <a:rPr lang="en-US" sz="1500" dirty="0">
+                <a:solidFill>
+                  <a:schemeClr val="tx1"/>
+                </a:solidFill>
+              </a:rPr>
+              <a:t>Learning from a record is sample average approximation over predictors: a rich class can fit any record, so its record score is not evidence.</a:t>
+            </a:r>
+            <a:endParaRPr lang="en-US" sz="1500" dirty="0"/>
+          </a:p>
+        </p:txBody>
+      </p:sp>
+      <p:sp>
+        <p:nvSpPr>
+          <p:cNvPr id="11" name="Number"/>
           <p:cNvSpPr/>
           <p:nvPr/>
         </p:nvSpPr>
         <p:spPr>
           <a:xfrm>
-            <a:off x="6233008" y="1691640"/>
-            <a:ext cx="2567864" cy="1691640"/>
-          </a:xfrm>
-          <a:prstGeom prst="roundRect">
-            <a:avLst>
-              <a:gd name="adj" fmla="val 4324"/>
-            </a:avLst>
+            <a:off x="548640" y="3529584"/>
+            <a:ext cx="566928" cy="566928"/>
+          </a:xfrm>
+          <a:prstGeom prst="ellipse">
+            <a:avLst/>
           </a:prstGeom>
           <a:solidFill>
-            <a:schemeClr val="bg2"/>
+            <a:schemeClr val="accent1"/>
           </a:solidFill>
-          <a:ln w="9525">
+          <a:ln w="6350">
             <a:solidFill>
-              <a:srgbClr val="C4CBD8"/>
+              <a:schemeClr val="accent1"/>
             </a:solidFill>
             <a:prstDash val="solid"/>
           </a:ln>
@@ -17155,14 +17571,14 @@
       </p:sp>
       <p:sp>
         <p:nvSpPr>
-          <p:cNvPr id="12" name="Stat value"/>
+          <p:cNvPr id="12" name="Text 9"/>
           <p:cNvSpPr txBox="1"/>
           <p:nvPr/>
         </p:nvSpPr>
         <p:spPr>
           <a:xfrm>
-            <a:off x="6370168" y="1801368"/>
-            <a:ext cx="2293544" cy="914400"/>
+            <a:off x="548640" y="3529584"/>
+            <a:ext cx="566928" cy="566928"/>
           </a:xfrm>
           <a:prstGeom prst="rect">
             <a:avLst/>
@@ -17178,30 +17594,30 @@
               <a:buNone/>
             </a:pPr>
             <a:r>
-              <a:rPr lang="en-US" sz="4400" b="1" dirty="0">
-                <a:solidFill>
-                  <a:schemeClr val="tx1"/>
-                </a:solidFill>
-                <a:latin typeface="Cambria" pitchFamily="34" charset="0"/>
-                <a:ea typeface="Cambria" pitchFamily="34" charset="-122"/>
-                <a:cs typeface="Cambria" pitchFamily="34" charset="-120"/>
-              </a:rPr>
-              <a:t>26213</a:t>
-            </a:r>
-            <a:endParaRPr lang="en-US" sz="4400" dirty="0"/>
-          </a:p>
-        </p:txBody>
-      </p:sp>
-      <p:sp>
-        <p:nvSpPr>
-          <p:cNvPr id="13" name="Stat label"/>
+              <a:rPr lang="en-US" sz="1500" b="1" dirty="0">
+                <a:solidFill>
+                  <a:schemeClr val="bg1"/>
+                </a:solidFill>
+                <a:latin typeface="Calibri" pitchFamily="34" charset="0"/>
+                <a:ea typeface="Calibri" pitchFamily="34" charset="-122"/>
+                <a:cs typeface="Calibri" pitchFamily="34" charset="-120"/>
+              </a:rPr>
+              <a:t>3</a:t>
+            </a:r>
+            <a:endParaRPr lang="en-US" sz="1500" dirty="0"/>
+          </a:p>
+        </p:txBody>
+      </p:sp>
+      <p:sp>
+        <p:nvSpPr>
+          <p:cNvPr id="13" name="Row text"/>
           <p:cNvSpPr txBox="1"/>
           <p:nvPr/>
         </p:nvSpPr>
         <p:spPr>
           <a:xfrm>
-            <a:off x="6370168" y="2697480"/>
-            <a:ext cx="2293544" cy="612648"/>
+            <a:off x="1325880" y="3483864"/>
+            <a:ext cx="10317175" cy="841248"/>
           </a:xfrm>
           <a:prstGeom prst="rect">
             <a:avLst/>
@@ -17210,46 +17626,44 @@
           <a:ln/>
         </p:spPr>
         <p:txBody>
-          <a:bodyPr wrap="square" lIns="0" tIns="0" rIns="0" bIns="0" rtlCol="0" anchor="t"/>
-          <a:lstStyle/>
-          <a:p>
-            <a:pPr algn="ctr" indent="0" marL="0">
+          <a:bodyPr wrap="square" lIns="0" tIns="0" rIns="0" bIns="0" rtlCol="0" anchor="ctr"/>
+          <a:lstStyle/>
+          <a:p>
+            <a:pPr indent="0" marL="0">
               <a:buNone/>
             </a:pPr>
             <a:r>
-              <a:rPr lang="en-US" sz="1400" dirty="0">
-                <a:solidFill>
-                  <a:schemeClr val="tx2"/>
-                </a:solidFill>
-              </a:rPr>
-              <a:t>the lab's seed</a:t>
-            </a:r>
-            <a:endParaRPr lang="en-US" sz="1400" dirty="0"/>
-          </a:p>
-        </p:txBody>
-      </p:sp>
-      <p:sp>
-        <p:nvSpPr>
-          <p:cNvPr id="14" name="Stat card"/>
+              <a:rPr lang="en-US" sz="1500" dirty="0">
+                <a:solidFill>
+                  <a:schemeClr val="tx1"/>
+                </a:solidFill>
+              </a:rPr>
+              <a:t>A prediction is worth the decisions it changes. Its threshold comes from the decision's costs, and its value is capped by the information in its inputs.</a:t>
+            </a:r>
+            <a:endParaRPr lang="en-US" sz="1500" dirty="0"/>
+          </a:p>
+        </p:txBody>
+      </p:sp>
+      <p:sp>
+        <p:nvSpPr>
+          <p:cNvPr id="14" name="Number"/>
           <p:cNvSpPr/>
           <p:nvPr/>
         </p:nvSpPr>
         <p:spPr>
           <a:xfrm>
-            <a:off x="9075191" y="1691640"/>
-            <a:ext cx="2567864" cy="1691640"/>
-          </a:xfrm>
-          <a:prstGeom prst="roundRect">
-            <a:avLst>
-              <a:gd name="adj" fmla="val 4324"/>
-            </a:avLst>
+            <a:off x="548640" y="4425696"/>
+            <a:ext cx="566928" cy="566928"/>
+          </a:xfrm>
+          <a:prstGeom prst="ellipse">
+            <a:avLst/>
           </a:prstGeom>
           <a:solidFill>
-            <a:schemeClr val="bg2"/>
+            <a:schemeClr val="accent1"/>
           </a:solidFill>
-          <a:ln w="9525">
+          <a:ln w="6350">
             <a:solidFill>
-              <a:srgbClr val="C4CBD8"/>
+              <a:schemeClr val="accent1"/>
             </a:solidFill>
             <a:prstDash val="solid"/>
           </a:ln>
@@ -17257,14 +17671,14 @@
       </p:sp>
       <p:sp>
         <p:nvSpPr>
-          <p:cNvPr id="15" name="Stat value"/>
+          <p:cNvPr id="15" name="Text 12"/>
           <p:cNvSpPr txBox="1"/>
           <p:nvPr/>
         </p:nvSpPr>
         <p:spPr>
           <a:xfrm>
-            <a:off x="9212351" y="1801368"/>
-            <a:ext cx="2293544" cy="914400"/>
+            <a:off x="548640" y="4425696"/>
+            <a:ext cx="566928" cy="566928"/>
           </a:xfrm>
           <a:prstGeom prst="rect">
             <a:avLst/>
@@ -17280,30 +17694,30 @@
               <a:buNone/>
             </a:pPr>
             <a:r>
-              <a:rPr lang="en-US" sz="3000" b="1" dirty="0">
-                <a:solidFill>
-                  <a:schemeClr val="tx1"/>
-                </a:solidFill>
-                <a:latin typeface="Cambria" pitchFamily="34" charset="0"/>
-                <a:ea typeface="Cambria" pitchFamily="34" charset="-122"/>
-                <a:cs typeface="Cambria" pitchFamily="34" charset="-120"/>
-              </a:rPr>
-              <a:t>AXIOM-13</a:t>
-            </a:r>
-            <a:endParaRPr lang="en-US" sz="3000" dirty="0"/>
-          </a:p>
-        </p:txBody>
-      </p:sp>
-      <p:sp>
-        <p:nvSpPr>
-          <p:cNvPr id="16" name="Stat label"/>
+              <a:rPr lang="en-US" sz="1500" b="1" dirty="0">
+                <a:solidFill>
+                  <a:schemeClr val="bg1"/>
+                </a:solidFill>
+                <a:latin typeface="Calibri" pitchFamily="34" charset="0"/>
+                <a:ea typeface="Calibri" pitchFamily="34" charset="-122"/>
+                <a:cs typeface="Calibri" pitchFamily="34" charset="-120"/>
+              </a:rPr>
+              <a:t>4</a:t>
+            </a:r>
+            <a:endParaRPr lang="en-US" sz="1500" dirty="0"/>
+          </a:p>
+        </p:txBody>
+      </p:sp>
+      <p:sp>
+        <p:nvSpPr>
+          <p:cNvPr id="16" name="Row text"/>
           <p:cNvSpPr txBox="1"/>
           <p:nvPr/>
         </p:nvSpPr>
         <p:spPr>
           <a:xfrm>
-            <a:off x="9212351" y="2697480"/>
-            <a:ext cx="2293544" cy="612648"/>
+            <a:off x="1325880" y="4379976"/>
+            <a:ext cx="10317175" cy="841248"/>
           </a:xfrm>
           <a:prstGeom prst="rect">
             <a:avLst/>
@@ -17312,34 +17726,98 @@
           <a:ln/>
         </p:spPr>
         <p:txBody>
-          <a:bodyPr wrap="square" lIns="0" tIns="0" rIns="0" bIns="0" rtlCol="0" anchor="t"/>
+          <a:bodyPr wrap="square" lIns="0" tIns="0" rIns="0" bIns="0" rtlCol="0" anchor="ctr"/>
+          <a:lstStyle/>
+          <a:p>
+            <a:pPr indent="0" marL="0">
+              <a:buNone/>
+            </a:pPr>
+            <a:r>
+              <a:rPr lang="en-US" sz="1500" dirty="0">
+                <a:solidFill>
+                  <a:schemeClr val="tx1"/>
+                </a:solidFill>
+              </a:rPr>
+              <a:t>Fresh data, confidence bounds, and conformal sets give guarantees while the future resembles the record; certify designs on bounds, not point estimates.</a:t>
+            </a:r>
+            <a:endParaRPr lang="en-US" sz="1500" dirty="0"/>
+          </a:p>
+        </p:txBody>
+      </p:sp>
+      <p:sp>
+        <p:nvSpPr>
+          <p:cNvPr id="17" name="Number"/>
+          <p:cNvSpPr/>
+          <p:nvPr/>
+        </p:nvSpPr>
+        <p:spPr>
+          <a:xfrm>
+            <a:off x="548640" y="5321808"/>
+            <a:ext cx="566928" cy="566928"/>
+          </a:xfrm>
+          <a:prstGeom prst="ellipse">
+            <a:avLst/>
+          </a:prstGeom>
+          <a:solidFill>
+            <a:schemeClr val="accent1"/>
+          </a:solidFill>
+          <a:ln w="6350">
+            <a:solidFill>
+              <a:schemeClr val="accent1"/>
+            </a:solidFill>
+            <a:prstDash val="solid"/>
+          </a:ln>
+        </p:spPr>
+      </p:sp>
+      <p:sp>
+        <p:nvSpPr>
+          <p:cNvPr id="18" name="Text 15"/>
+          <p:cNvSpPr txBox="1"/>
+          <p:nvPr/>
+        </p:nvSpPr>
+        <p:spPr>
+          <a:xfrm>
+            <a:off x="548640" y="5321808"/>
+            <a:ext cx="566928" cy="566928"/>
+          </a:xfrm>
+          <a:prstGeom prst="rect">
+            <a:avLst/>
+          </a:prstGeom>
+          <a:noFill/>
+          <a:ln/>
+        </p:spPr>
+        <p:txBody>
+          <a:bodyPr wrap="square" lIns="0" tIns="0" rIns="0" bIns="0" rtlCol="0" anchor="ctr"/>
           <a:lstStyle/>
           <a:p>
             <a:pPr algn="ctr" indent="0" marL="0">
               <a:buNone/>
             </a:pPr>
             <a:r>
-              <a:rPr lang="en-US" sz="1400" dirty="0">
-                <a:solidFill>
-                  <a:schemeClr val="tx2"/>
-                </a:solidFill>
-              </a:rPr>
-              <a:t>AXIOM Lab 2.13</a:t>
-            </a:r>
-            <a:endParaRPr lang="en-US" sz="1400" dirty="0"/>
-          </a:p>
-        </p:txBody>
-      </p:sp>
-      <p:sp>
-        <p:nvSpPr>
-          <p:cNvPr id="17" name="Bullets"/>
+              <a:rPr lang="en-US" sz="1500" b="1" dirty="0">
+                <a:solidFill>
+                  <a:schemeClr val="bg1"/>
+                </a:solidFill>
+                <a:latin typeface="Calibri" pitchFamily="34" charset="0"/>
+                <a:ea typeface="Calibri" pitchFamily="34" charset="-122"/>
+                <a:cs typeface="Calibri" pitchFamily="34" charset="-120"/>
+              </a:rPr>
+              <a:t>5</a:t>
+            </a:r>
+            <a:endParaRPr lang="en-US" sz="1500" dirty="0"/>
+          </a:p>
+        </p:txBody>
+      </p:sp>
+      <p:sp>
+        <p:nvSpPr>
+          <p:cNvPr id="19" name="Row text"/>
           <p:cNvSpPr txBox="1"/>
           <p:nvPr/>
         </p:nvSpPr>
         <p:spPr>
           <a:xfrm>
-            <a:off x="548640" y="3703320"/>
-            <a:ext cx="11094415" cy="2468880"/>
+            <a:off x="1325880" y="5276088"/>
+            <a:ext cx="10317175" cy="841248"/>
           </a:xfrm>
           <a:prstGeom prst="rect">
             <a:avLst/>
@@ -17348,59 +17826,21 @@
           <a:ln/>
         </p:spPr>
         <p:txBody>
-          <a:bodyPr wrap="square" lIns="635" tIns="635" rIns="635" bIns="635" rtlCol="0" anchor="t"/>
-          <a:lstStyle/>
-          <a:p>
-            <a:pPr marL="228600" indent="-228600">
-              <a:spcAft>
-                <a:spcPts val="800"/>
-              </a:spcAft>
-              <a:buSzPct val="100000"/>
-              <a:buChar char="•"/>
-            </a:pPr>
-            <a:r>
-              <a:rPr lang="en-US" sz="1700" b="1" dirty="0">
+          <a:bodyPr wrap="square" lIns="0" tIns="0" rIns="0" bIns="0" rtlCol="0" anchor="ctr"/>
+          <a:lstStyle/>
+          <a:p>
+            <a:pPr indent="0" marL="0">
+              <a:buNone/>
+            </a:pPr>
+            <a:r>
+              <a:rPr lang="en-US" sz="1500" dirty="0">
                 <a:solidFill>
                   <a:schemeClr val="tx1"/>
                 </a:solidFill>
               </a:rPr>
-              <a:t>Notebook</a:t>
-            </a:r>
-            <a:r>
-              <a:rPr lang="en-US" sz="1700" dirty="0">
-                <a:solidFill>
-                  <a:schemeClr val="tx1"/>
-                </a:solidFill>
-              </a:rPr>
-              <a:t> DCT_V2_Ch13_Lab.ipynb: Worked Example 13.1 and the lab's five steps in eight panels, on Chapter 9's paths and the book's seeds</a:t>
-            </a:r>
-            <a:endParaRPr lang="en-US" sz="1700" dirty="0"/>
-          </a:p>
-          <a:p>
-            <a:pPr marL="228600" indent="-228600">
-              <a:spcAft>
-                <a:spcPts val="800"/>
-              </a:spcAft>
-              <a:buSzPct val="100000"/>
-              <a:buChar char="•"/>
-            </a:pPr>
-            <a:r>
-              <a:rPr lang="en-US" sz="1700" b="1" dirty="0">
-                <a:solidFill>
-                  <a:schemeClr val="tx1"/>
-                </a:solidFill>
-              </a:rPr>
-              <a:t>Workbook</a:t>
-            </a:r>
-            <a:r>
-              <a:rPr lang="en-US" sz="1700" dirty="0">
-                <a:solidFill>
-                  <a:schemeClr val="tx1"/>
-                </a:solidFill>
-              </a:rPr>
-              <a:t> DCT_V2_Ch13_Lab.xlsx: the declared law, the shares and bounds, the two-package arithmetic and Table 13.3, in formulas</a:t>
-            </a:r>
-            <a:endParaRPr lang="en-US" sz="1700" dirty="0"/>
+              <a:t>Principal components keep variance, not relevance, and attributions describe a model under a declared game. The desk's warning is worth at most $1.44 million and, certified, about $1 million.</a:t>
+            </a:r>
+            <a:endParaRPr lang="en-US" sz="1500" dirty="0"/>
           </a:p>
         </p:txBody>
       </p:sp>
@@ -17506,6 +17946,637 @@
                   <a:schemeClr val="accent1"/>
                 </a:solidFill>
               </a:rPr>
+              <a:t>THIS WEEK'S LABORATORY</a:t>
+            </a:r>
+            <a:endParaRPr lang="en-US" sz="1200" dirty="0"/>
+          </a:p>
+        </p:txBody>
+      </p:sp>
+      <p:sp>
+        <p:nvSpPr>
+          <p:cNvPr id="4" name="Text 1"/>
+          <p:cNvSpPr/>
+          <p:nvPr>
+            <p:ph idx="103" type="title" hasCustomPrompt="1"/>
+          </p:nvPr>
+        </p:nvSpPr>
+        <p:spPr>
+          <a:xfrm>
+            <a:off x="548640" y="658368"/>
+            <a:ext cx="11094415" cy="868680"/>
+          </a:xfrm>
+          <a:prstGeom prst="rect">
+            <a:avLst/>
+          </a:prstGeom>
+          <a:noFill/>
+          <a:ln/>
+        </p:spPr>
+        <p:txBody>
+          <a:bodyPr wrap="square" lIns="0" tIns="0" rIns="0" bIns="0" rtlCol="0" anchor="t"/>
+          <a:lstStyle/>
+          <a:p>
+            <a:pPr algn="l" indent="0" marL="0">
+              <a:buNone/>
+            </a:pPr>
+            <a:r>
+              <a:rPr lang="en-US" sz="3200" b="1" dirty="0">
+                <a:solidFill>
+                  <a:schemeClr val="tx1"/>
+                </a:solidFill>
+                <a:latin typeface="Cambria" pitchFamily="34" charset="0"/>
+                <a:ea typeface="Cambria" pitchFamily="34" charset="-122"/>
+                <a:cs typeface="Cambria" pitchFamily="34" charset="-120"/>
+              </a:rPr>
+              <a:t>Notebook and workbook reproduce the book</a:t>
+            </a:r>
+            <a:endParaRPr lang="en-US" sz="3200" dirty="0"/>
+          </a:p>
+        </p:txBody>
+      </p:sp>
+      <p:sp>
+        <p:nvSpPr>
+          <p:cNvPr id="5" name="Stat card"/>
+          <p:cNvSpPr/>
+          <p:nvPr/>
+        </p:nvSpPr>
+        <p:spPr>
+          <a:xfrm>
+            <a:off x="548640" y="1691640"/>
+            <a:ext cx="2567864" cy="1691640"/>
+          </a:xfrm>
+          <a:prstGeom prst="roundRect">
+            <a:avLst>
+              <a:gd name="adj" fmla="val 4324"/>
+            </a:avLst>
+          </a:prstGeom>
+          <a:solidFill>
+            <a:schemeClr val="tx1"/>
+          </a:solidFill>
+          <a:ln w="9525">
+            <a:solidFill>
+              <a:srgbClr val="0F1E3D"/>
+            </a:solidFill>
+            <a:prstDash val="solid"/>
+          </a:ln>
+        </p:spPr>
+      </p:sp>
+      <p:sp>
+        <p:nvSpPr>
+          <p:cNvPr id="6" name="Stat value"/>
+          <p:cNvSpPr txBox="1"/>
+          <p:nvPr/>
+        </p:nvSpPr>
+        <p:spPr>
+          <a:xfrm>
+            <a:off x="685800" y="1801368"/>
+            <a:ext cx="2293544" cy="914400"/>
+          </a:xfrm>
+          <a:prstGeom prst="rect">
+            <a:avLst/>
+          </a:prstGeom>
+          <a:noFill/>
+          <a:ln/>
+        </p:spPr>
+        <p:txBody>
+          <a:bodyPr wrap="square" lIns="0" tIns="0" rIns="0" bIns="0" rtlCol="0" anchor="ctr"/>
+          <a:lstStyle/>
+          <a:p>
+            <a:pPr algn="ctr" indent="0" marL="0">
+              <a:buNone/>
+            </a:pPr>
+            <a:r>
+              <a:rPr lang="en-US" sz="4400" b="1" dirty="0">
+                <a:solidFill>
+                  <a:schemeClr val="accent1"/>
+                </a:solidFill>
+                <a:latin typeface="Cambria" pitchFamily="34" charset="0"/>
+                <a:ea typeface="Cambria" pitchFamily="34" charset="-122"/>
+                <a:cs typeface="Cambria" pitchFamily="34" charset="-120"/>
+              </a:rPr>
+              <a:t>376</a:t>
+            </a:r>
+            <a:endParaRPr lang="en-US" sz="4400" dirty="0"/>
+          </a:p>
+        </p:txBody>
+      </p:sp>
+      <p:sp>
+        <p:nvSpPr>
+          <p:cNvPr id="7" name="Stat label"/>
+          <p:cNvSpPr txBox="1"/>
+          <p:nvPr/>
+        </p:nvSpPr>
+        <p:spPr>
+          <a:xfrm>
+            <a:off x="685800" y="2697480"/>
+            <a:ext cx="2293544" cy="612648"/>
+          </a:xfrm>
+          <a:prstGeom prst="rect">
+            <a:avLst/>
+          </a:prstGeom>
+          <a:noFill/>
+          <a:ln/>
+        </p:spPr>
+        <p:txBody>
+          <a:bodyPr wrap="square" lIns="0" tIns="0" rIns="0" bIns="0" rtlCol="0" anchor="t"/>
+          <a:lstStyle/>
+          <a:p>
+            <a:pPr algn="ctr" indent="0" marL="0">
+              <a:buNone/>
+            </a:pPr>
+            <a:r>
+              <a:rPr lang="en-US" sz="1400" dirty="0">
+                <a:solidFill>
+                  <a:schemeClr val="bg2"/>
+                </a:solidFill>
+              </a:rPr>
+              <a:t>notebook checkpoints, every one PASS</a:t>
+            </a:r>
+            <a:endParaRPr lang="en-US" sz="1400" dirty="0"/>
+          </a:p>
+        </p:txBody>
+      </p:sp>
+      <p:sp>
+        <p:nvSpPr>
+          <p:cNvPr id="8" name="Stat card"/>
+          <p:cNvSpPr/>
+          <p:nvPr/>
+        </p:nvSpPr>
+        <p:spPr>
+          <a:xfrm>
+            <a:off x="3390824" y="1691640"/>
+            <a:ext cx="2567864" cy="1691640"/>
+          </a:xfrm>
+          <a:prstGeom prst="roundRect">
+            <a:avLst>
+              <a:gd name="adj" fmla="val 4324"/>
+            </a:avLst>
+          </a:prstGeom>
+          <a:solidFill>
+            <a:schemeClr val="bg2"/>
+          </a:solidFill>
+          <a:ln w="9525">
+            <a:solidFill>
+              <a:srgbClr val="C4CBD8"/>
+            </a:solidFill>
+            <a:prstDash val="solid"/>
+          </a:ln>
+        </p:spPr>
+      </p:sp>
+      <p:sp>
+        <p:nvSpPr>
+          <p:cNvPr id="9" name="Stat value"/>
+          <p:cNvSpPr txBox="1"/>
+          <p:nvPr/>
+        </p:nvSpPr>
+        <p:spPr>
+          <a:xfrm>
+            <a:off x="3527984" y="1801368"/>
+            <a:ext cx="2293544" cy="914400"/>
+          </a:xfrm>
+          <a:prstGeom prst="rect">
+            <a:avLst/>
+          </a:prstGeom>
+          <a:noFill/>
+          <a:ln/>
+        </p:spPr>
+        <p:txBody>
+          <a:bodyPr wrap="square" lIns="0" tIns="0" rIns="0" bIns="0" rtlCol="0" anchor="ctr"/>
+          <a:lstStyle/>
+          <a:p>
+            <a:pPr algn="ctr" indent="0" marL="0">
+              <a:buNone/>
+            </a:pPr>
+            <a:r>
+              <a:rPr lang="en-US" sz="4400" b="1" dirty="0">
+                <a:solidFill>
+                  <a:schemeClr val="tx1"/>
+                </a:solidFill>
+                <a:latin typeface="Cambria" pitchFamily="34" charset="0"/>
+                <a:ea typeface="Cambria" pitchFamily="34" charset="-122"/>
+                <a:cs typeface="Cambria" pitchFamily="34" charset="-120"/>
+              </a:rPr>
+              <a:t>203</a:t>
+            </a:r>
+            <a:endParaRPr lang="en-US" sz="4400" dirty="0"/>
+          </a:p>
+        </p:txBody>
+      </p:sp>
+      <p:sp>
+        <p:nvSpPr>
+          <p:cNvPr id="10" name="Stat label"/>
+          <p:cNvSpPr txBox="1"/>
+          <p:nvPr/>
+        </p:nvSpPr>
+        <p:spPr>
+          <a:xfrm>
+            <a:off x="3527984" y="2697480"/>
+            <a:ext cx="2293544" cy="612648"/>
+          </a:xfrm>
+          <a:prstGeom prst="rect">
+            <a:avLst/>
+          </a:prstGeom>
+          <a:noFill/>
+          <a:ln/>
+        </p:spPr>
+        <p:txBody>
+          <a:bodyPr wrap="square" lIns="0" tIns="0" rIns="0" bIns="0" rtlCol="0" anchor="t"/>
+          <a:lstStyle/>
+          <a:p>
+            <a:pPr algn="ctr" indent="0" marL="0">
+              <a:buNone/>
+            </a:pPr>
+            <a:r>
+              <a:rPr lang="en-US" sz="1400" dirty="0">
+                <a:solidFill>
+                  <a:schemeClr val="tx2"/>
+                </a:solidFill>
+              </a:rPr>
+              <a:t>workbook checks against the engine, ALL PASS</a:t>
+            </a:r>
+            <a:endParaRPr lang="en-US" sz="1400" dirty="0"/>
+          </a:p>
+        </p:txBody>
+      </p:sp>
+      <p:sp>
+        <p:nvSpPr>
+          <p:cNvPr id="11" name="Stat card"/>
+          <p:cNvSpPr/>
+          <p:nvPr/>
+        </p:nvSpPr>
+        <p:spPr>
+          <a:xfrm>
+            <a:off x="6233008" y="1691640"/>
+            <a:ext cx="2567864" cy="1691640"/>
+          </a:xfrm>
+          <a:prstGeom prst="roundRect">
+            <a:avLst>
+              <a:gd name="adj" fmla="val 4324"/>
+            </a:avLst>
+          </a:prstGeom>
+          <a:solidFill>
+            <a:schemeClr val="bg2"/>
+          </a:solidFill>
+          <a:ln w="9525">
+            <a:solidFill>
+              <a:srgbClr val="C4CBD8"/>
+            </a:solidFill>
+            <a:prstDash val="solid"/>
+          </a:ln>
+        </p:spPr>
+      </p:sp>
+      <p:sp>
+        <p:nvSpPr>
+          <p:cNvPr id="12" name="Stat value"/>
+          <p:cNvSpPr txBox="1"/>
+          <p:nvPr/>
+        </p:nvSpPr>
+        <p:spPr>
+          <a:xfrm>
+            <a:off x="6370168" y="1801368"/>
+            <a:ext cx="2293544" cy="914400"/>
+          </a:xfrm>
+          <a:prstGeom prst="rect">
+            <a:avLst/>
+          </a:prstGeom>
+          <a:noFill/>
+          <a:ln/>
+        </p:spPr>
+        <p:txBody>
+          <a:bodyPr wrap="square" lIns="0" tIns="0" rIns="0" bIns="0" rtlCol="0" anchor="ctr"/>
+          <a:lstStyle/>
+          <a:p>
+            <a:pPr algn="ctr" indent="0" marL="0">
+              <a:buNone/>
+            </a:pPr>
+            <a:r>
+              <a:rPr lang="en-US" sz="4400" b="1" dirty="0">
+                <a:solidFill>
+                  <a:schemeClr val="tx1"/>
+                </a:solidFill>
+                <a:latin typeface="Cambria" pitchFamily="34" charset="0"/>
+                <a:ea typeface="Cambria" pitchFamily="34" charset="-122"/>
+                <a:cs typeface="Cambria" pitchFamily="34" charset="-120"/>
+              </a:rPr>
+              <a:t>26213</a:t>
+            </a:r>
+            <a:endParaRPr lang="en-US" sz="4400" dirty="0"/>
+          </a:p>
+        </p:txBody>
+      </p:sp>
+      <p:sp>
+        <p:nvSpPr>
+          <p:cNvPr id="13" name="Stat label"/>
+          <p:cNvSpPr txBox="1"/>
+          <p:nvPr/>
+        </p:nvSpPr>
+        <p:spPr>
+          <a:xfrm>
+            <a:off x="6370168" y="2697480"/>
+            <a:ext cx="2293544" cy="612648"/>
+          </a:xfrm>
+          <a:prstGeom prst="rect">
+            <a:avLst/>
+          </a:prstGeom>
+          <a:noFill/>
+          <a:ln/>
+        </p:spPr>
+        <p:txBody>
+          <a:bodyPr wrap="square" lIns="0" tIns="0" rIns="0" bIns="0" rtlCol="0" anchor="t"/>
+          <a:lstStyle/>
+          <a:p>
+            <a:pPr algn="ctr" indent="0" marL="0">
+              <a:buNone/>
+            </a:pPr>
+            <a:r>
+              <a:rPr lang="en-US" sz="1400" dirty="0">
+                <a:solidFill>
+                  <a:schemeClr val="tx2"/>
+                </a:solidFill>
+              </a:rPr>
+              <a:t>the lab's seed</a:t>
+            </a:r>
+            <a:endParaRPr lang="en-US" sz="1400" dirty="0"/>
+          </a:p>
+        </p:txBody>
+      </p:sp>
+      <p:sp>
+        <p:nvSpPr>
+          <p:cNvPr id="14" name="Stat card"/>
+          <p:cNvSpPr/>
+          <p:nvPr/>
+        </p:nvSpPr>
+        <p:spPr>
+          <a:xfrm>
+            <a:off x="9075191" y="1691640"/>
+            <a:ext cx="2567864" cy="1691640"/>
+          </a:xfrm>
+          <a:prstGeom prst="roundRect">
+            <a:avLst>
+              <a:gd name="adj" fmla="val 4324"/>
+            </a:avLst>
+          </a:prstGeom>
+          <a:solidFill>
+            <a:schemeClr val="bg2"/>
+          </a:solidFill>
+          <a:ln w="9525">
+            <a:solidFill>
+              <a:srgbClr val="C4CBD8"/>
+            </a:solidFill>
+            <a:prstDash val="solid"/>
+          </a:ln>
+        </p:spPr>
+      </p:sp>
+      <p:sp>
+        <p:nvSpPr>
+          <p:cNvPr id="15" name="Stat value"/>
+          <p:cNvSpPr txBox="1"/>
+          <p:nvPr/>
+        </p:nvSpPr>
+        <p:spPr>
+          <a:xfrm>
+            <a:off x="9212351" y="1801368"/>
+            <a:ext cx="2293544" cy="914400"/>
+          </a:xfrm>
+          <a:prstGeom prst="rect">
+            <a:avLst/>
+          </a:prstGeom>
+          <a:noFill/>
+          <a:ln/>
+        </p:spPr>
+        <p:txBody>
+          <a:bodyPr wrap="square" lIns="0" tIns="0" rIns="0" bIns="0" rtlCol="0" anchor="ctr"/>
+          <a:lstStyle/>
+          <a:p>
+            <a:pPr algn="ctr" indent="0" marL="0">
+              <a:buNone/>
+            </a:pPr>
+            <a:r>
+              <a:rPr lang="en-US" sz="3000" b="1" dirty="0">
+                <a:solidFill>
+                  <a:schemeClr val="tx1"/>
+                </a:solidFill>
+                <a:latin typeface="Cambria" pitchFamily="34" charset="0"/>
+                <a:ea typeface="Cambria" pitchFamily="34" charset="-122"/>
+                <a:cs typeface="Cambria" pitchFamily="34" charset="-120"/>
+              </a:rPr>
+              <a:t>AXIOM-13</a:t>
+            </a:r>
+            <a:endParaRPr lang="en-US" sz="3000" dirty="0"/>
+          </a:p>
+        </p:txBody>
+      </p:sp>
+      <p:sp>
+        <p:nvSpPr>
+          <p:cNvPr id="16" name="Stat label"/>
+          <p:cNvSpPr txBox="1"/>
+          <p:nvPr/>
+        </p:nvSpPr>
+        <p:spPr>
+          <a:xfrm>
+            <a:off x="9212351" y="2697480"/>
+            <a:ext cx="2293544" cy="612648"/>
+          </a:xfrm>
+          <a:prstGeom prst="rect">
+            <a:avLst/>
+          </a:prstGeom>
+          <a:noFill/>
+          <a:ln/>
+        </p:spPr>
+        <p:txBody>
+          <a:bodyPr wrap="square" lIns="0" tIns="0" rIns="0" bIns="0" rtlCol="0" anchor="t"/>
+          <a:lstStyle/>
+          <a:p>
+            <a:pPr algn="ctr" indent="0" marL="0">
+              <a:buNone/>
+            </a:pPr>
+            <a:r>
+              <a:rPr lang="en-US" sz="1400" dirty="0">
+                <a:solidFill>
+                  <a:schemeClr val="tx2"/>
+                </a:solidFill>
+              </a:rPr>
+              <a:t>AXIOM Lab 2.13</a:t>
+            </a:r>
+            <a:endParaRPr lang="en-US" sz="1400" dirty="0"/>
+          </a:p>
+        </p:txBody>
+      </p:sp>
+      <p:sp>
+        <p:nvSpPr>
+          <p:cNvPr id="17" name="Bullets"/>
+          <p:cNvSpPr txBox="1"/>
+          <p:nvPr/>
+        </p:nvSpPr>
+        <p:spPr>
+          <a:xfrm>
+            <a:off x="548640" y="3703320"/>
+            <a:ext cx="11094415" cy="2468880"/>
+          </a:xfrm>
+          <a:prstGeom prst="rect">
+            <a:avLst/>
+          </a:prstGeom>
+          <a:noFill/>
+          <a:ln/>
+        </p:spPr>
+        <p:txBody>
+          <a:bodyPr wrap="square" lIns="635" tIns="635" rIns="635" bIns="635" rtlCol="0" anchor="t"/>
+          <a:lstStyle/>
+          <a:p>
+            <a:pPr marL="228600" indent="-228600">
+              <a:spcAft>
+                <a:spcPts val="800"/>
+              </a:spcAft>
+              <a:buSzPct val="100000"/>
+              <a:buChar char="•"/>
+            </a:pPr>
+            <a:r>
+              <a:rPr lang="en-US" sz="1700" b="1" dirty="0">
+                <a:solidFill>
+                  <a:schemeClr val="tx1"/>
+                </a:solidFill>
+              </a:rPr>
+              <a:t>Notebook</a:t>
+            </a:r>
+            <a:r>
+              <a:rPr lang="en-US" sz="1700" dirty="0">
+                <a:solidFill>
+                  <a:schemeClr val="tx1"/>
+                </a:solidFill>
+              </a:rPr>
+              <a:t> DCT_V2_Ch13_Lab.ipynb: Worked Example 13.1 and the lab's five steps in eight panels, on Chapter 9's paths and the book's seeds</a:t>
+            </a:r>
+            <a:endParaRPr lang="en-US" sz="1700" dirty="0"/>
+          </a:p>
+          <a:p>
+            <a:pPr marL="228600" indent="-228600">
+              <a:spcAft>
+                <a:spcPts val="800"/>
+              </a:spcAft>
+              <a:buSzPct val="100000"/>
+              <a:buChar char="•"/>
+            </a:pPr>
+            <a:r>
+              <a:rPr lang="en-US" sz="1700" b="1" dirty="0">
+                <a:solidFill>
+                  <a:schemeClr val="tx1"/>
+                </a:solidFill>
+              </a:rPr>
+              <a:t>Workbook</a:t>
+            </a:r>
+            <a:r>
+              <a:rPr lang="en-US" sz="1700" dirty="0">
+                <a:solidFill>
+                  <a:schemeClr val="tx1"/>
+                </a:solidFill>
+              </a:rPr>
+              <a:t> DCT_V2_Ch13_Lab.xlsx: the declared law, the shares and bounds, the two-package arithmetic and Table 13.3, in formulas</a:t>
+            </a:r>
+            <a:endParaRPr lang="en-US" sz="1700" dirty="0"/>
+          </a:p>
+        </p:txBody>
+      </p:sp>
+      <p:sp>
+        <p:nvSpPr>
+          <p:cNvPr id="25" name="Slide Number Placeholder 0"/>
+          <p:cNvSpPr>
+            <a:spLocks noGrp="1"/>
+          </p:cNvSpPr>
+          <p:nvPr>
+            <p:ph type="sldNum" sz="quarter" idx="4294967295"/>
+          </p:nvPr>
+        </p:nvSpPr>
+        <p:spPr>
+          <a:xfrm>
+            <a:off x="11094415" y="6382512"/>
+            <a:ext cx="548640" cy="237744"/>
+          </a:xfrm>
+          <a:prstGeom prst="rect">
+            <a:avLst/>
+          </a:prstGeom>
+          <a:extLst>
+            <a:ext uri="{C572A759-6A51-4108-AA02-DFA0A04FC94B}">
+              <ma14:wrappingTextBoxFlag xmlns:ma14="http://schemas.microsoft.com/office/mac/drawingml/2011/main" val="0"/>
+            </a:ext>
+          </a:extLst>
+        </p:spPr>
+        <p:txBody>
+          <a:bodyPr/>
+          <a:lstStyle>
+            <a:lvl1pPr>
+              <a:defRPr sz="1000">
+                <a:solidFill>
+                  <a:srgbClr val="5A6B82"/>
+                </a:solidFill>
+              </a:defRPr>
+            </a:lvl1pPr>
+          </a:lstStyle>
+          <a:p>
+            <a:pPr algn="r"/>
+            <a:fld id="{F7021451-1387-4CA6-816F-3879F97B5CBC}" type="slidenum">
+              <a:rPr b="0" lang="en-US"/>
+              <a:t>22</a:t>
+            </a:fld>
+            <a:endParaRPr lang="en-US"/>
+          </a:p>
+        </p:txBody>
+      </p:sp>
+    </p:spTree>
+  </p:cSld>
+  <p:clrMapOvr>
+    <a:masterClrMapping/>
+  </p:clrMapOvr>
+</p:sld>
+</file>
+
+<file path=ppt/slides/slide23.xml><?xml version="1.0" encoding="utf-8"?>
+<p:sld xmlns:a="http://schemas.openxmlformats.org/drawingml/2006/main" xmlns:r="http://schemas.openxmlformats.org/officeDocument/2006/relationships" xmlns:p="http://schemas.openxmlformats.org/presentationml/2006/main">
+  <p:cSld name="Slide 23">
+    <p:spTree>
+      <p:nvGrpSpPr>
+        <p:cNvPr id="1" name=""/>
+        <p:cNvGrpSpPr/>
+        <p:nvPr/>
+      </p:nvGrpSpPr>
+      <p:grpSpPr>
+        <a:xfrm>
+          <a:off x="0" y="0"/>
+          <a:ext cx="0" cy="0"/>
+          <a:chOff x="0" y="0"/>
+          <a:chExt cx="0" cy="0"/>
+        </a:xfrm>
+      </p:grpSpPr>
+      <p:sp>
+        <p:nvSpPr>
+          <p:cNvPr id="3" name="Text 1"/>
+          <p:cNvSpPr/>
+          <p:nvPr>
+            <p:ph idx="102" type="body" hasCustomPrompt="1"/>
+          </p:nvPr>
+        </p:nvSpPr>
+        <p:spPr>
+          <a:xfrm>
+            <a:off x="548640" y="347472"/>
+            <a:ext cx="11094415" cy="292608"/>
+          </a:xfrm>
+          <a:prstGeom prst="rect">
+            <a:avLst/>
+          </a:prstGeom>
+          <a:noFill/>
+          <a:ln/>
+        </p:spPr>
+        <p:txBody>
+          <a:bodyPr wrap="square" lIns="0" tIns="0" rIns="0" bIns="0" rtlCol="0"/>
+          <a:lstStyle/>
+          <a:p>
+            <a:pPr indent="0" marL="0">
+              <a:buNone/>
+            </a:pPr>
+            <a:r>
+              <a:rPr lang="en-US" sz="1200" b="1" spc="200" kern="0" dirty="0">
+                <a:solidFill>
+                  <a:schemeClr val="accent1"/>
+                </a:solidFill>
+              </a:rPr>
               <a:t>NEXT · CHAPTER 14</a:t>
             </a:r>
             <a:endParaRPr lang="en-US" sz="1200" dirty="0"/>
@@ -17692,7 +18763,7 @@
             <a:pPr algn="r"/>
             <a:fld id="{F7021451-1387-4CA6-816F-3879F97B5CBC}" type="slidenum">
               <a:rPr b="0" lang="en-US"/>
-              <a:t>22</a:t>
+              <a:t>23</a:t>
             </a:fld>
             <a:endParaRPr lang="en-US"/>
           </a:p>
@@ -18445,7 +19516,7 @@
                 <a:ea typeface="Cambria" pitchFamily="34" charset="-122"/>
                 <a:cs typeface="Cambria" pitchFamily="34" charset="-120"/>
               </a:rPr>
-              <a:t>Five sections, a worked example and a lab</a:t>
+              <a:t>Five sections, a worked example, a case and a lab</a:t>
             </a:r>
             <a:endParaRPr lang="en-US" sz="3200" dirty="0"/>
           </a:p>
@@ -19336,7 +20407,7 @@
                   <a:schemeClr val="accent1"/>
                 </a:solidFill>
               </a:rPr>
-              <a:t>AXIOM Lab 2.13</a:t>
+              <a:t>In Practice</a:t>
             </a:r>
             <a:endParaRPr lang="en-US" sz="1300" dirty="0"/>
           </a:p>
@@ -19375,7 +20446,7 @@
                 <a:ea typeface="Cambria" pitchFamily="34" charset="-122"/>
                 <a:cs typeface="Cambria" pitchFamily="34" charset="-120"/>
               </a:rPr>
-              <a:t>Pricing a Learned Warning: Records, Thresholds, and Fresh Paths</a:t>
+              <a:t>Netflix Pays a Million Dollars for Ten Percent</a:t>
             </a:r>
             <a:endParaRPr lang="en-US" sz="1500" dirty="0"/>
           </a:p>
@@ -19390,6 +20461,144 @@
         <p:spPr>
           <a:xfrm>
             <a:off x="6415888" y="5660136"/>
+            <a:ext cx="2202104" cy="384048"/>
+          </a:xfrm>
+          <a:prstGeom prst="rect">
+            <a:avLst/>
+          </a:prstGeom>
+          <a:noFill/>
+          <a:ln/>
+        </p:spPr>
+        <p:txBody>
+          <a:bodyPr wrap="square" lIns="0" tIns="0" rIns="0" bIns="0" rtlCol="0" anchor="t"/>
+          <a:lstStyle/>
+          <a:p>
+            <a:pPr indent="0" marL="0">
+              <a:buNone/>
+            </a:pPr>
+            <a:r>
+              <a:rPr lang="en-US" sz="1300" dirty="0">
+                <a:solidFill>
+                  <a:schemeClr val="tx2"/>
+                </a:solidFill>
+              </a:rPr>
+              <a:t>At a Glance · board questions</a:t>
+            </a:r>
+            <a:endParaRPr lang="en-US" sz="1300" dirty="0"/>
+          </a:p>
+        </p:txBody>
+      </p:sp>
+      <p:sp>
+        <p:nvSpPr>
+          <p:cNvPr id="33" name="Card"/>
+          <p:cNvSpPr/>
+          <p:nvPr/>
+        </p:nvSpPr>
+        <p:spPr>
+          <a:xfrm>
+            <a:off x="9075191" y="4069080"/>
+            <a:ext cx="2567864" cy="2103120"/>
+          </a:xfrm>
+          <a:prstGeom prst="roundRect">
+            <a:avLst>
+              <a:gd name="adj" fmla="val 3478"/>
+            </a:avLst>
+          </a:prstGeom>
+          <a:solidFill>
+            <a:schemeClr val="bg2"/>
+          </a:solidFill>
+          <a:ln w="9525">
+            <a:solidFill>
+              <a:srgbClr val="C4CBD8"/>
+            </a:solidFill>
+            <a:prstDash val="solid"/>
+          </a:ln>
+        </p:spPr>
+      </p:sp>
+      <p:sp>
+        <p:nvSpPr>
+          <p:cNvPr id="34" name="Card label"/>
+          <p:cNvSpPr txBox="1"/>
+          <p:nvPr/>
+        </p:nvSpPr>
+        <p:spPr>
+          <a:xfrm>
+            <a:off x="9258071" y="4197096"/>
+            <a:ext cx="2202104" cy="310896"/>
+          </a:xfrm>
+          <a:prstGeom prst="rect">
+            <a:avLst/>
+          </a:prstGeom>
+          <a:noFill/>
+          <a:ln/>
+        </p:spPr>
+        <p:txBody>
+          <a:bodyPr wrap="square" lIns="0" tIns="0" rIns="0" bIns="0" rtlCol="0" anchor="ctr"/>
+          <a:lstStyle/>
+          <a:p>
+            <a:pPr indent="0" marL="0">
+              <a:buNone/>
+            </a:pPr>
+            <a:r>
+              <a:rPr lang="en-US" sz="1300" b="1" dirty="0">
+                <a:solidFill>
+                  <a:schemeClr val="accent1"/>
+                </a:solidFill>
+              </a:rPr>
+              <a:t>AXIOM Lab 2.13</a:t>
+            </a:r>
+            <a:endParaRPr lang="en-US" sz="1300" dirty="0"/>
+          </a:p>
+        </p:txBody>
+      </p:sp>
+      <p:sp>
+        <p:nvSpPr>
+          <p:cNvPr id="35" name="Card head"/>
+          <p:cNvSpPr txBox="1"/>
+          <p:nvPr/>
+        </p:nvSpPr>
+        <p:spPr>
+          <a:xfrm>
+            <a:off x="9258071" y="4526280"/>
+            <a:ext cx="2202104" cy="1060704"/>
+          </a:xfrm>
+          <a:prstGeom prst="rect">
+            <a:avLst/>
+          </a:prstGeom>
+          <a:noFill/>
+          <a:ln/>
+        </p:spPr>
+        <p:txBody>
+          <a:bodyPr wrap="square" lIns="0" tIns="0" rIns="0" bIns="0" rtlCol="0" anchor="t"/>
+          <a:lstStyle/>
+          <a:p>
+            <a:pPr indent="0" marL="0">
+              <a:buNone/>
+            </a:pPr>
+            <a:r>
+              <a:rPr lang="en-US" sz="1500" b="1" dirty="0">
+                <a:solidFill>
+                  <a:schemeClr val="tx1"/>
+                </a:solidFill>
+                <a:latin typeface="Cambria" pitchFamily="34" charset="0"/>
+                <a:ea typeface="Cambria" pitchFamily="34" charset="-122"/>
+                <a:cs typeface="Cambria" pitchFamily="34" charset="-120"/>
+              </a:rPr>
+              <a:t>Pricing a Learned Warning: Records, Thresholds, and Fresh Paths</a:t>
+            </a:r>
+            <a:endParaRPr lang="en-US" sz="1500" dirty="0"/>
+          </a:p>
+        </p:txBody>
+      </p:sp>
+      <p:sp>
+        <p:nvSpPr>
+          <p:cNvPr id="36" name="Card text"/>
+          <p:cNvSpPr txBox="1"/>
+          <p:nvPr/>
+        </p:nvSpPr>
+        <p:spPr>
+          <a:xfrm>
+            <a:off x="9258071" y="5660136"/>
             <a:ext cx="2202104" cy="384048"/>
           </a:xfrm>
           <a:prstGeom prst="rect">
